--- a/中間発表.pptx
+++ b/中間発表.pptx
@@ -12,6 +12,8 @@
     <p:sldId id="260" r:id="rId6"/>
     <p:sldId id="261" r:id="rId7"/>
     <p:sldId id="262" r:id="rId8"/>
+    <p:sldId id="263" r:id="rId9"/>
+    <p:sldId id="264" r:id="rId10"/>
   </p:sldIdLst>
   <p:sldSz cx="12192000" cy="6858000"/>
   <p:notesSz cx="6858000" cy="9144000"/>
@@ -110,6 +112,11 @@
       </a:defRPr>
     </a:lvl9pPr>
   </p:defaultTextStyle>
+  <p:extLst>
+    <p:ext uri="{EFAFB233-063F-42B5-8137-9DF3F51BA10A}">
+      <p15:sldGuideLst xmlns:p15="http://schemas.microsoft.com/office/powerpoint/2012/main"/>
+    </p:ext>
+  </p:extLst>
 </p:presentation>
 </file>
 
@@ -282,7 +289,7 @@
           <a:p>
             <a:fld id="{191ECDAA-2EC1-4CFD-B44D-7EEFC63F5507}" type="datetimeFigureOut">
               <a:rPr kumimoji="1" lang="ja-JP" altLang="en-US" smtClean="0"/>
-              <a:t>2026/6/30</a:t>
+              <a:t>2026/7/3</a:t>
             </a:fld>
             <a:endParaRPr kumimoji="1" lang="ja-JP" altLang="en-US"/>
           </a:p>
@@ -425,6 +432,13 @@
               <a:tailEnd/>
             </a:ln>
           </p:spPr>
+          <p:txBody>
+            <a:bodyPr/>
+            <a:lstStyle/>
+            <a:p>
+              <a:endParaRPr lang="ja-JP" altLang="en-US"/>
+            </a:p>
+          </p:txBody>
         </p:sp>
         <p:sp>
           <p:nvSpPr>
@@ -483,6 +497,13 @@
               <a:tailEnd/>
             </a:ln>
           </p:spPr>
+          <p:txBody>
+            <a:bodyPr/>
+            <a:lstStyle/>
+            <a:p>
+              <a:endParaRPr lang="ja-JP" altLang="en-US"/>
+            </a:p>
+          </p:txBody>
         </p:sp>
       </p:grpSp>
     </p:spTree>
@@ -644,7 +665,7 @@
           <a:p>
             <a:fld id="{191ECDAA-2EC1-4CFD-B44D-7EEFC63F5507}" type="datetimeFigureOut">
               <a:rPr kumimoji="1" lang="ja-JP" altLang="en-US" smtClean="0"/>
-              <a:t>2026/6/30</a:t>
+              <a:t>2026/7/3</a:t>
             </a:fld>
             <a:endParaRPr kumimoji="1" lang="ja-JP" altLang="en-US"/>
           </a:p>
@@ -856,7 +877,7 @@
           <a:p>
             <a:fld id="{191ECDAA-2EC1-4CFD-B44D-7EEFC63F5507}" type="datetimeFigureOut">
               <a:rPr kumimoji="1" lang="ja-JP" altLang="en-US" smtClean="0"/>
-              <a:t>2026/6/30</a:t>
+              <a:t>2026/7/3</a:t>
             </a:fld>
             <a:endParaRPr kumimoji="1" lang="ja-JP" altLang="en-US"/>
           </a:p>
@@ -1058,7 +1079,7 @@
           <a:p>
             <a:fld id="{191ECDAA-2EC1-4CFD-B44D-7EEFC63F5507}" type="datetimeFigureOut">
               <a:rPr kumimoji="1" lang="ja-JP" altLang="en-US" smtClean="0"/>
-              <a:t>2026/6/30</a:t>
+              <a:t>2026/7/3</a:t>
             </a:fld>
             <a:endParaRPr kumimoji="1" lang="ja-JP" altLang="en-US"/>
           </a:p>
@@ -1335,7 +1356,7 @@
           <a:p>
             <a:fld id="{191ECDAA-2EC1-4CFD-B44D-7EEFC63F5507}" type="datetimeFigureOut">
               <a:rPr kumimoji="1" lang="ja-JP" altLang="en-US" smtClean="0"/>
-              <a:t>2026/6/30</a:t>
+              <a:t>2026/7/3</a:t>
             </a:fld>
             <a:endParaRPr kumimoji="1" lang="ja-JP" altLang="en-US"/>
           </a:p>
@@ -1793,7 +1814,7 @@
           <a:p>
             <a:fld id="{191ECDAA-2EC1-4CFD-B44D-7EEFC63F5507}" type="datetimeFigureOut">
               <a:rPr kumimoji="1" lang="ja-JP" altLang="en-US" smtClean="0"/>
-              <a:t>2026/6/30</a:t>
+              <a:t>2026/7/3</a:t>
             </a:fld>
             <a:endParaRPr kumimoji="1" lang="ja-JP" altLang="en-US"/>
           </a:p>
@@ -2334,7 +2355,7 @@
           <a:p>
             <a:fld id="{191ECDAA-2EC1-4CFD-B44D-7EEFC63F5507}" type="datetimeFigureOut">
               <a:rPr kumimoji="1" lang="ja-JP" altLang="en-US" smtClean="0"/>
-              <a:t>2026/6/30</a:t>
+              <a:t>2026/7/3</a:t>
             </a:fld>
             <a:endParaRPr kumimoji="1" lang="ja-JP" altLang="en-US"/>
           </a:p>
@@ -2452,7 +2473,7 @@
           <a:p>
             <a:fld id="{191ECDAA-2EC1-4CFD-B44D-7EEFC63F5507}" type="datetimeFigureOut">
               <a:rPr kumimoji="1" lang="ja-JP" altLang="en-US" smtClean="0"/>
-              <a:t>2026/6/30</a:t>
+              <a:t>2026/7/3</a:t>
             </a:fld>
             <a:endParaRPr kumimoji="1" lang="ja-JP" altLang="en-US"/>
           </a:p>
@@ -2547,7 +2568,7 @@
           <a:p>
             <a:fld id="{191ECDAA-2EC1-4CFD-B44D-7EEFC63F5507}" type="datetimeFigureOut">
               <a:rPr kumimoji="1" lang="ja-JP" altLang="en-US" smtClean="0"/>
-              <a:t>2026/6/30</a:t>
+              <a:t>2026/7/3</a:t>
             </a:fld>
             <a:endParaRPr kumimoji="1" lang="ja-JP" altLang="en-US"/>
           </a:p>
@@ -2925,7 +2946,7 @@
           <a:p>
             <a:fld id="{191ECDAA-2EC1-4CFD-B44D-7EEFC63F5507}" type="datetimeFigureOut">
               <a:rPr kumimoji="1" lang="ja-JP" altLang="en-US" smtClean="0"/>
-              <a:t>2026/6/30</a:t>
+              <a:t>2026/7/3</a:t>
             </a:fld>
             <a:endParaRPr kumimoji="1" lang="ja-JP" altLang="en-US"/>
           </a:p>
@@ -3313,7 +3334,7 @@
           <a:p>
             <a:fld id="{191ECDAA-2EC1-4CFD-B44D-7EEFC63F5507}" type="datetimeFigureOut">
               <a:rPr kumimoji="1" lang="ja-JP" altLang="en-US" smtClean="0"/>
-              <a:t>2026/6/30</a:t>
+              <a:t>2026/7/3</a:t>
             </a:fld>
             <a:endParaRPr kumimoji="1" lang="ja-JP" altLang="en-US"/>
           </a:p>
@@ -3623,7 +3644,7 @@
           <a:p>
             <a:fld id="{191ECDAA-2EC1-4CFD-B44D-7EEFC63F5507}" type="datetimeFigureOut">
               <a:rPr kumimoji="1" lang="ja-JP" altLang="en-US" smtClean="0"/>
-              <a:t>2026/6/30</a:t>
+              <a:t>2026/7/3</a:t>
             </a:fld>
             <a:endParaRPr kumimoji="1" lang="ja-JP" altLang="en-US"/>
           </a:p>
@@ -3740,6 +3761,13 @@
             <a:schemeClr val="lt1"/>
           </a:fontRef>
         </p:style>
+        <p:txBody>
+          <a:bodyPr/>
+          <a:lstStyle/>
+          <a:p>
+            <a:endParaRPr lang="ja-JP" altLang="en-US"/>
+          </a:p>
+        </p:txBody>
       </p:sp>
     </p:spTree>
     <p:extLst>
@@ -5171,6 +5199,322 @@
 </p:sld>
 </file>
 
+<file path=ppt/slides/slide8.xml><?xml version="1.0" encoding="utf-8"?>
+<p:sld xmlns:a="http://schemas.openxmlformats.org/drawingml/2006/main" xmlns:r="http://schemas.openxmlformats.org/officeDocument/2006/relationships" xmlns:p="http://schemas.openxmlformats.org/presentationml/2006/main">
+  <p:cSld>
+    <p:bg>
+      <p:bgPr>
+        <a:solidFill>
+          <a:schemeClr val="bg2"/>
+        </a:solidFill>
+        <a:effectLst/>
+      </p:bgPr>
+    </p:bg>
+    <p:spTree>
+      <p:nvGrpSpPr>
+        <p:cNvPr id="1" name=""/>
+        <p:cNvGrpSpPr/>
+        <p:nvPr/>
+      </p:nvGrpSpPr>
+      <p:grpSpPr>
+        <a:xfrm>
+          <a:off x="0" y="0"/>
+          <a:ext cx="0" cy="0"/>
+          <a:chOff x="0" y="0"/>
+          <a:chExt cx="0" cy="0"/>
+        </a:xfrm>
+      </p:grpSpPr>
+      <p:sp>
+        <p:nvSpPr>
+          <p:cNvPr id="8" name="Rectangle 7">
+            <a:extLst>
+              <a:ext uri="{FF2B5EF4-FFF2-40B4-BE49-F238E27FC236}">
+                <a16:creationId xmlns:a16="http://schemas.microsoft.com/office/drawing/2014/main" id="{3362DFFC-4DCC-48EE-B781-94D04B95F1E8}"/>
+              </a:ext>
+              <a:ext uri="{C183D7F6-B498-43B3-948B-1728B52AA6E4}">
+                <adec:decorative xmlns:adec="http://schemas.microsoft.com/office/drawing/2017/decorative" val="1"/>
+              </a:ext>
+            </a:extLst>
+          </p:cNvPr>
+          <p:cNvSpPr>
+            <a:spLocks noGrp="1" noRot="1" noChangeAspect="1" noMove="1" noResize="1" noEditPoints="1" noAdjustHandles="1" noChangeArrowheads="1" noChangeShapeType="1" noTextEdit="1"/>
+          </p:cNvSpPr>
+          <p:nvPr>
+            <p:extLst>
+              <p:ext uri="{386F3935-93C4-4BCD-93E2-E3B085C9AB24}">
+                <p16:designElem xmlns:p16="http://schemas.microsoft.com/office/powerpoint/2015/main" val="1"/>
+              </p:ext>
+            </p:extLst>
+          </p:nvPr>
+        </p:nvSpPr>
+        <p:spPr>
+          <a:xfrm>
+            <a:off x="0" y="376"/>
+            <a:ext cx="5303520" cy="6857624"/>
+          </a:xfrm>
+          <a:prstGeom prst="rect">
+            <a:avLst/>
+          </a:prstGeom>
+          <a:solidFill>
+            <a:schemeClr val="tx2"/>
+          </a:solidFill>
+          <a:ln>
+            <a:noFill/>
+          </a:ln>
+        </p:spPr>
+        <p:style>
+          <a:lnRef idx="2">
+            <a:schemeClr val="accent1">
+              <a:shade val="50000"/>
+            </a:schemeClr>
+          </a:lnRef>
+          <a:fillRef idx="1">
+            <a:schemeClr val="accent1"/>
+          </a:fillRef>
+          <a:effectRef idx="0">
+            <a:schemeClr val="accent1"/>
+          </a:effectRef>
+          <a:fontRef idx="minor">
+            <a:schemeClr val="lt1"/>
+          </a:fontRef>
+        </p:style>
+        <p:txBody>
+          <a:bodyPr/>
+          <a:lstStyle/>
+          <a:p>
+            <a:endParaRPr lang="ja-JP" altLang="en-US"/>
+          </a:p>
+        </p:txBody>
+      </p:sp>
+      <p:sp>
+        <p:nvSpPr>
+          <p:cNvPr id="2" name="タイトル 1">
+            <a:extLst>
+              <a:ext uri="{FF2B5EF4-FFF2-40B4-BE49-F238E27FC236}">
+                <a16:creationId xmlns:a16="http://schemas.microsoft.com/office/drawing/2014/main" id="{FCE260DC-07DC-D277-A73C-C58FD1FF3319}"/>
+              </a:ext>
+            </a:extLst>
+          </p:cNvPr>
+          <p:cNvSpPr>
+            <a:spLocks noGrp="1"/>
+          </p:cNvSpPr>
+          <p:nvPr>
+            <p:ph type="title"/>
+          </p:nvPr>
+        </p:nvSpPr>
+        <p:spPr>
+          <a:xfrm>
+            <a:off x="640081" y="791570"/>
+            <a:ext cx="4018839" cy="5262390"/>
+          </a:xfrm>
+        </p:spPr>
+        <p:txBody>
+          <a:bodyPr anchor="ctr">
+            <a:normAutofit/>
+          </a:bodyPr>
+          <a:lstStyle/>
+          <a:p>
+            <a:pPr algn="r"/>
+            <a:r>
+              <a:rPr kumimoji="1" lang="ja-JP" altLang="en-US" sz="5400" dirty="0">
+                <a:solidFill>
+                  <a:schemeClr val="bg2"/>
+                </a:solidFill>
+              </a:rPr>
+              <a:t>チラシ課題</a:t>
+            </a:r>
+          </a:p>
+        </p:txBody>
+      </p:sp>
+      <p:sp>
+        <p:nvSpPr>
+          <p:cNvPr id="10" name="Rectangle 9">
+            <a:extLst>
+              <a:ext uri="{FF2B5EF4-FFF2-40B4-BE49-F238E27FC236}">
+                <a16:creationId xmlns:a16="http://schemas.microsoft.com/office/drawing/2014/main" id="{18B8B265-E68C-4B64-9238-781F0102C57B}"/>
+              </a:ext>
+              <a:ext uri="{C183D7F6-B498-43B3-948B-1728B52AA6E4}">
+                <adec:decorative xmlns:adec="http://schemas.microsoft.com/office/drawing/2017/decorative" val="1"/>
+              </a:ext>
+            </a:extLst>
+          </p:cNvPr>
+          <p:cNvSpPr>
+            <a:spLocks noGrp="1" noRot="1" noChangeAspect="1" noMove="1" noResize="1" noEditPoints="1" noAdjustHandles="1" noChangeArrowheads="1" noChangeShapeType="1" noTextEdit="1"/>
+          </p:cNvSpPr>
+          <p:nvPr>
+            <p:extLst>
+              <p:ext uri="{386F3935-93C4-4BCD-93E2-E3B085C9AB24}">
+                <p16:designElem xmlns:p16="http://schemas.microsoft.com/office/powerpoint/2015/main" val="1"/>
+              </p:ext>
+            </p:extLst>
+          </p:nvPr>
+        </p:nvSpPr>
+        <p:spPr>
+          <a:xfrm>
+            <a:off x="5303520" y="376"/>
+            <a:ext cx="228600" cy="6858000"/>
+          </a:xfrm>
+          <a:prstGeom prst="rect">
+            <a:avLst/>
+          </a:prstGeom>
+          <a:solidFill>
+            <a:schemeClr val="accent1">
+              <a:lumMod val="75000"/>
+            </a:schemeClr>
+          </a:solidFill>
+          <a:ln>
+            <a:noFill/>
+          </a:ln>
+        </p:spPr>
+        <p:style>
+          <a:lnRef idx="2">
+            <a:schemeClr val="accent1">
+              <a:shade val="50000"/>
+            </a:schemeClr>
+          </a:lnRef>
+          <a:fillRef idx="1">
+            <a:schemeClr val="accent1"/>
+          </a:fillRef>
+          <a:effectRef idx="0">
+            <a:schemeClr val="accent1"/>
+          </a:effectRef>
+          <a:fontRef idx="minor">
+            <a:schemeClr val="lt1"/>
+          </a:fontRef>
+        </p:style>
+        <p:txBody>
+          <a:bodyPr/>
+          <a:lstStyle/>
+          <a:p>
+            <a:endParaRPr lang="ja-JP" altLang="en-US"/>
+          </a:p>
+        </p:txBody>
+      </p:sp>
+      <p:sp>
+        <p:nvSpPr>
+          <p:cNvPr id="3" name="コンテンツ プレースホルダー 2">
+            <a:extLst>
+              <a:ext uri="{FF2B5EF4-FFF2-40B4-BE49-F238E27FC236}">
+                <a16:creationId xmlns:a16="http://schemas.microsoft.com/office/drawing/2014/main" id="{0C3E306B-9A03-89C8-4143-42B7868D97EB}"/>
+              </a:ext>
+            </a:extLst>
+          </p:cNvPr>
+          <p:cNvSpPr>
+            <a:spLocks noGrp="1"/>
+          </p:cNvSpPr>
+          <p:nvPr>
+            <p:ph idx="1"/>
+          </p:nvPr>
+        </p:nvSpPr>
+        <p:spPr>
+          <a:xfrm>
+            <a:off x="6176720" y="791570"/>
+            <a:ext cx="4892308" cy="5262390"/>
+          </a:xfrm>
+        </p:spPr>
+        <p:txBody>
+          <a:bodyPr anchor="ctr">
+            <a:normAutofit/>
+          </a:bodyPr>
+          <a:lstStyle/>
+          <a:p>
+            <a:endParaRPr kumimoji="1" lang="ja-JP" altLang="en-US" sz="1800" dirty="0"/>
+          </a:p>
+        </p:txBody>
+      </p:sp>
+    </p:spTree>
+    <p:extLst>
+      <p:ext uri="{BB962C8B-B14F-4D97-AF65-F5344CB8AC3E}">
+        <p14:creationId xmlns:p14="http://schemas.microsoft.com/office/powerpoint/2010/main" val="1828314959"/>
+      </p:ext>
+    </p:extLst>
+  </p:cSld>
+  <p:clrMapOvr>
+    <a:masterClrMapping/>
+  </p:clrMapOvr>
+</p:sld>
+</file>
+
+<file path=ppt/slides/slide9.xml><?xml version="1.0" encoding="utf-8"?>
+<p:sld xmlns:a="http://schemas.openxmlformats.org/drawingml/2006/main" xmlns:r="http://schemas.openxmlformats.org/officeDocument/2006/relationships" xmlns:p="http://schemas.openxmlformats.org/presentationml/2006/main">
+  <p:cSld>
+    <p:spTree>
+      <p:nvGrpSpPr>
+        <p:cNvPr id="1" name=""/>
+        <p:cNvGrpSpPr/>
+        <p:nvPr/>
+      </p:nvGrpSpPr>
+      <p:grpSpPr>
+        <a:xfrm>
+          <a:off x="0" y="0"/>
+          <a:ext cx="0" cy="0"/>
+          <a:chOff x="0" y="0"/>
+          <a:chExt cx="0" cy="0"/>
+        </a:xfrm>
+      </p:grpSpPr>
+      <p:sp>
+        <p:nvSpPr>
+          <p:cNvPr id="2" name="タイトル 1">
+            <a:extLst>
+              <a:ext uri="{FF2B5EF4-FFF2-40B4-BE49-F238E27FC236}">
+                <a16:creationId xmlns:a16="http://schemas.microsoft.com/office/drawing/2014/main" id="{3EC21A96-5921-9A1B-F9DA-65DC9FC8689B}"/>
+              </a:ext>
+            </a:extLst>
+          </p:cNvPr>
+          <p:cNvSpPr>
+            <a:spLocks noGrp="1"/>
+          </p:cNvSpPr>
+          <p:nvPr>
+            <p:ph type="title"/>
+          </p:nvPr>
+        </p:nvSpPr>
+        <p:spPr/>
+        <p:txBody>
+          <a:bodyPr/>
+          <a:lstStyle/>
+          <a:p>
+            <a:endParaRPr kumimoji="1" lang="ja-JP" altLang="en-US"/>
+          </a:p>
+        </p:txBody>
+      </p:sp>
+      <p:sp>
+        <p:nvSpPr>
+          <p:cNvPr id="3" name="コンテンツ プレースホルダー 2">
+            <a:extLst>
+              <a:ext uri="{FF2B5EF4-FFF2-40B4-BE49-F238E27FC236}">
+                <a16:creationId xmlns:a16="http://schemas.microsoft.com/office/drawing/2014/main" id="{ACD3DDF3-A6EE-97F2-B2B6-615DC906815C}"/>
+              </a:ext>
+            </a:extLst>
+          </p:cNvPr>
+          <p:cNvSpPr>
+            <a:spLocks noGrp="1"/>
+          </p:cNvSpPr>
+          <p:nvPr>
+            <p:ph idx="1"/>
+          </p:nvPr>
+        </p:nvSpPr>
+        <p:spPr/>
+        <p:txBody>
+          <a:bodyPr/>
+          <a:lstStyle/>
+          <a:p>
+            <a:endParaRPr kumimoji="1" lang="ja-JP" altLang="en-US"/>
+          </a:p>
+        </p:txBody>
+      </p:sp>
+    </p:spTree>
+    <p:extLst>
+      <p:ext uri="{BB962C8B-B14F-4D97-AF65-F5344CB8AC3E}">
+        <p14:creationId xmlns:p14="http://schemas.microsoft.com/office/powerpoint/2010/main" val="2463679976"/>
+      </p:ext>
+    </p:extLst>
+  </p:cSld>
+  <p:clrMapOvr>
+    <a:masterClrMapping/>
+  </p:clrMapOvr>
+</p:sld>
+</file>
+
 <file path=ppt/theme/theme1.xml><?xml version="1.0" encoding="utf-8"?>
 <a:theme xmlns:a="http://schemas.openxmlformats.org/drawingml/2006/main" name="トリミング">
   <a:themeElements>

--- a/中間発表.pptx
+++ b/中間発表.pptx
@@ -6,14 +6,16 @@
   </p:sldMasterIdLst>
   <p:sldIdLst>
     <p:sldId id="256" r:id="rId2"/>
-    <p:sldId id="257" r:id="rId3"/>
-    <p:sldId id="258" r:id="rId4"/>
-    <p:sldId id="259" r:id="rId5"/>
-    <p:sldId id="260" r:id="rId6"/>
-    <p:sldId id="261" r:id="rId7"/>
-    <p:sldId id="262" r:id="rId8"/>
-    <p:sldId id="263" r:id="rId9"/>
-    <p:sldId id="264" r:id="rId10"/>
+    <p:sldId id="265" r:id="rId3"/>
+    <p:sldId id="257" r:id="rId4"/>
+    <p:sldId id="258" r:id="rId5"/>
+    <p:sldId id="259" r:id="rId6"/>
+    <p:sldId id="260" r:id="rId7"/>
+    <p:sldId id="261" r:id="rId8"/>
+    <p:sldId id="262" r:id="rId9"/>
+    <p:sldId id="263" r:id="rId10"/>
+    <p:sldId id="264" r:id="rId11"/>
+    <p:sldId id="266" r:id="rId12"/>
   </p:sldIdLst>
   <p:sldSz cx="12192000" cy="6858000"/>
   <p:notesSz cx="6858000" cy="9144000"/>
@@ -289,7 +291,7 @@
           <a:p>
             <a:fld id="{191ECDAA-2EC1-4CFD-B44D-7EEFC63F5507}" type="datetimeFigureOut">
               <a:rPr kumimoji="1" lang="ja-JP" altLang="en-US" smtClean="0"/>
-              <a:t>2026/7/3</a:t>
+              <a:t>2026/7/6</a:t>
             </a:fld>
             <a:endParaRPr kumimoji="1" lang="ja-JP" altLang="en-US"/>
           </a:p>
@@ -665,7 +667,7 @@
           <a:p>
             <a:fld id="{191ECDAA-2EC1-4CFD-B44D-7EEFC63F5507}" type="datetimeFigureOut">
               <a:rPr kumimoji="1" lang="ja-JP" altLang="en-US" smtClean="0"/>
-              <a:t>2026/7/3</a:t>
+              <a:t>2026/7/6</a:t>
             </a:fld>
             <a:endParaRPr kumimoji="1" lang="ja-JP" altLang="en-US"/>
           </a:p>
@@ -877,7 +879,7 @@
           <a:p>
             <a:fld id="{191ECDAA-2EC1-4CFD-B44D-7EEFC63F5507}" type="datetimeFigureOut">
               <a:rPr kumimoji="1" lang="ja-JP" altLang="en-US" smtClean="0"/>
-              <a:t>2026/7/3</a:t>
+              <a:t>2026/7/6</a:t>
             </a:fld>
             <a:endParaRPr kumimoji="1" lang="ja-JP" altLang="en-US"/>
           </a:p>
@@ -1079,7 +1081,7 @@
           <a:p>
             <a:fld id="{191ECDAA-2EC1-4CFD-B44D-7EEFC63F5507}" type="datetimeFigureOut">
               <a:rPr kumimoji="1" lang="ja-JP" altLang="en-US" smtClean="0"/>
-              <a:t>2026/7/3</a:t>
+              <a:t>2026/7/6</a:t>
             </a:fld>
             <a:endParaRPr kumimoji="1" lang="ja-JP" altLang="en-US"/>
           </a:p>
@@ -1356,7 +1358,7 @@
           <a:p>
             <a:fld id="{191ECDAA-2EC1-4CFD-B44D-7EEFC63F5507}" type="datetimeFigureOut">
               <a:rPr kumimoji="1" lang="ja-JP" altLang="en-US" smtClean="0"/>
-              <a:t>2026/7/3</a:t>
+              <a:t>2026/7/6</a:t>
             </a:fld>
             <a:endParaRPr kumimoji="1" lang="ja-JP" altLang="en-US"/>
           </a:p>
@@ -1814,7 +1816,7 @@
           <a:p>
             <a:fld id="{191ECDAA-2EC1-4CFD-B44D-7EEFC63F5507}" type="datetimeFigureOut">
               <a:rPr kumimoji="1" lang="ja-JP" altLang="en-US" smtClean="0"/>
-              <a:t>2026/7/3</a:t>
+              <a:t>2026/7/6</a:t>
             </a:fld>
             <a:endParaRPr kumimoji="1" lang="ja-JP" altLang="en-US"/>
           </a:p>
@@ -2355,7 +2357,7 @@
           <a:p>
             <a:fld id="{191ECDAA-2EC1-4CFD-B44D-7EEFC63F5507}" type="datetimeFigureOut">
               <a:rPr kumimoji="1" lang="ja-JP" altLang="en-US" smtClean="0"/>
-              <a:t>2026/7/3</a:t>
+              <a:t>2026/7/6</a:t>
             </a:fld>
             <a:endParaRPr kumimoji="1" lang="ja-JP" altLang="en-US"/>
           </a:p>
@@ -2473,7 +2475,7 @@
           <a:p>
             <a:fld id="{191ECDAA-2EC1-4CFD-B44D-7EEFC63F5507}" type="datetimeFigureOut">
               <a:rPr kumimoji="1" lang="ja-JP" altLang="en-US" smtClean="0"/>
-              <a:t>2026/7/3</a:t>
+              <a:t>2026/7/6</a:t>
             </a:fld>
             <a:endParaRPr kumimoji="1" lang="ja-JP" altLang="en-US"/>
           </a:p>
@@ -2568,7 +2570,7 @@
           <a:p>
             <a:fld id="{191ECDAA-2EC1-4CFD-B44D-7EEFC63F5507}" type="datetimeFigureOut">
               <a:rPr kumimoji="1" lang="ja-JP" altLang="en-US" smtClean="0"/>
-              <a:t>2026/7/3</a:t>
+              <a:t>2026/7/6</a:t>
             </a:fld>
             <a:endParaRPr kumimoji="1" lang="ja-JP" altLang="en-US"/>
           </a:p>
@@ -2946,7 +2948,7 @@
           <a:p>
             <a:fld id="{191ECDAA-2EC1-4CFD-B44D-7EEFC63F5507}" type="datetimeFigureOut">
               <a:rPr kumimoji="1" lang="ja-JP" altLang="en-US" smtClean="0"/>
-              <a:t>2026/7/3</a:t>
+              <a:t>2026/7/6</a:t>
             </a:fld>
             <a:endParaRPr kumimoji="1" lang="ja-JP" altLang="en-US"/>
           </a:p>
@@ -3334,7 +3336,7 @@
           <a:p>
             <a:fld id="{191ECDAA-2EC1-4CFD-B44D-7EEFC63F5507}" type="datetimeFigureOut">
               <a:rPr kumimoji="1" lang="ja-JP" altLang="en-US" smtClean="0"/>
-              <a:t>2026/7/3</a:t>
+              <a:t>2026/7/6</a:t>
             </a:fld>
             <a:endParaRPr kumimoji="1" lang="ja-JP" altLang="en-US"/>
           </a:p>
@@ -3644,7 +3646,7 @@
           <a:p>
             <a:fld id="{191ECDAA-2EC1-4CFD-B44D-7EEFC63F5507}" type="datetimeFigureOut">
               <a:rPr kumimoji="1" lang="ja-JP" altLang="en-US" smtClean="0"/>
-              <a:t>2026/7/3</a:t>
+              <a:t>2026/7/6</a:t>
             </a:fld>
             <a:endParaRPr kumimoji="1" lang="ja-JP" altLang="en-US"/>
           </a:p>
@@ -4186,7 +4188,14 @@
           <a:p>
             <a:r>
               <a:rPr kumimoji="1" lang="ja-JP" altLang="en-US" dirty="0"/>
-              <a:t>中間発表</a:t>
+              <a:t>卒業制作</a:t>
+            </a:r>
+            <a:br>
+              <a:rPr kumimoji="1" lang="en-US" altLang="ja-JP" dirty="0"/>
+            </a:br>
+            <a:r>
+              <a:rPr kumimoji="1" lang="ja-JP" altLang="en-US" dirty="0"/>
+              <a:t>テーマ・中間発表</a:t>
             </a:r>
           </a:p>
         </p:txBody>
@@ -4209,15 +4218,17 @@
         </p:nvSpPr>
         <p:spPr/>
         <p:txBody>
-          <a:bodyPr/>
-          <a:lstStyle/>
-          <a:p>
-            <a:r>
-              <a:rPr kumimoji="1" lang="en-US" altLang="ja-JP" dirty="0"/>
+          <a:bodyPr>
+            <a:normAutofit/>
+          </a:bodyPr>
+          <a:lstStyle/>
+          <a:p>
+            <a:r>
+              <a:rPr kumimoji="1" lang="en-US" altLang="ja-JP" sz="4800" dirty="0"/>
               <a:t>25017</a:t>
             </a:r>
             <a:r>
-              <a:rPr kumimoji="1" lang="ja-JP" altLang="en-US" dirty="0"/>
+              <a:rPr kumimoji="1" lang="ja-JP" altLang="en-US" sz="4800" dirty="0"/>
               <a:t>　伊藤千裕</a:t>
             </a:r>
           </a:p>
@@ -4227,6 +4238,830 @@
     <p:extLst>
       <p:ext uri="{BB962C8B-B14F-4D97-AF65-F5344CB8AC3E}">
         <p14:creationId xmlns:p14="http://schemas.microsoft.com/office/powerpoint/2010/main" val="3506464247"/>
+      </p:ext>
+    </p:extLst>
+  </p:cSld>
+  <p:clrMapOvr>
+    <a:masterClrMapping/>
+  </p:clrMapOvr>
+</p:sld>
+</file>
+
+<file path=ppt/slides/slide10.xml><?xml version="1.0" encoding="utf-8"?>
+<p:sld xmlns:a="http://schemas.openxmlformats.org/drawingml/2006/main" xmlns:r="http://schemas.openxmlformats.org/officeDocument/2006/relationships" xmlns:p="http://schemas.openxmlformats.org/presentationml/2006/main">
+  <p:cSld>
+    <p:spTree>
+      <p:nvGrpSpPr>
+        <p:cNvPr id="1" name=""/>
+        <p:cNvGrpSpPr/>
+        <p:nvPr/>
+      </p:nvGrpSpPr>
+      <p:grpSpPr>
+        <a:xfrm>
+          <a:off x="0" y="0"/>
+          <a:ext cx="0" cy="0"/>
+          <a:chOff x="0" y="0"/>
+          <a:chExt cx="0" cy="0"/>
+        </a:xfrm>
+      </p:grpSpPr>
+      <p:sp>
+        <p:nvSpPr>
+          <p:cNvPr id="4" name="テキスト ボックス 3">
+            <a:extLst>
+              <a:ext uri="{FF2B5EF4-FFF2-40B4-BE49-F238E27FC236}">
+                <a16:creationId xmlns:a16="http://schemas.microsoft.com/office/drawing/2014/main" id="{5DBC680D-19D8-67D9-0D22-AAD6DD772B2C}"/>
+              </a:ext>
+            </a:extLst>
+          </p:cNvPr>
+          <p:cNvSpPr txBox="1"/>
+          <p:nvPr/>
+        </p:nvSpPr>
+        <p:spPr>
+          <a:xfrm>
+            <a:off x="1329267" y="457200"/>
+            <a:ext cx="3005951" cy="769441"/>
+          </a:xfrm>
+          <a:prstGeom prst="rect">
+            <a:avLst/>
+          </a:prstGeom>
+          <a:noFill/>
+        </p:spPr>
+        <p:txBody>
+          <a:bodyPr wrap="none" rtlCol="0">
+            <a:spAutoFit/>
+          </a:bodyPr>
+          <a:lstStyle/>
+          <a:p>
+            <a:r>
+              <a:rPr kumimoji="1" lang="ja-JP" altLang="en-US" sz="4400" dirty="0"/>
+              <a:t>チラシ内容</a:t>
+            </a:r>
+          </a:p>
+        </p:txBody>
+      </p:sp>
+      <p:sp>
+        <p:nvSpPr>
+          <p:cNvPr id="5" name="テキスト ボックス 4">
+            <a:extLst>
+              <a:ext uri="{FF2B5EF4-FFF2-40B4-BE49-F238E27FC236}">
+                <a16:creationId xmlns:a16="http://schemas.microsoft.com/office/drawing/2014/main" id="{B8801EBB-7DE6-D2F7-D6DE-A5253A71AF24}"/>
+              </a:ext>
+            </a:extLst>
+          </p:cNvPr>
+          <p:cNvSpPr txBox="1"/>
+          <p:nvPr/>
+        </p:nvSpPr>
+        <p:spPr>
+          <a:xfrm>
+            <a:off x="1329267" y="1876485"/>
+            <a:ext cx="3570208" cy="4524315"/>
+          </a:xfrm>
+          <a:prstGeom prst="rect">
+            <a:avLst/>
+          </a:prstGeom>
+          <a:noFill/>
+        </p:spPr>
+        <p:txBody>
+          <a:bodyPr wrap="none" rtlCol="0">
+            <a:spAutoFit/>
+          </a:bodyPr>
+          <a:lstStyle/>
+          <a:p>
+            <a:r>
+              <a:rPr lang="ja-JP" altLang="ja-JP" sz="4800" dirty="0"/>
+              <a:t>- タイトル</a:t>
+            </a:r>
+          </a:p>
+          <a:p>
+            <a:r>
+              <a:rPr lang="ja-JP" altLang="ja-JP" sz="4800" dirty="0"/>
+              <a:t>- 果樹園紹介</a:t>
+            </a:r>
+          </a:p>
+          <a:p>
+            <a:r>
+              <a:rPr lang="ja-JP" altLang="ja-JP" sz="4800" dirty="0"/>
+              <a:t>- 果実紹介</a:t>
+            </a:r>
+          </a:p>
+          <a:p>
+            <a:r>
+              <a:rPr lang="ja-JP" altLang="ja-JP" sz="4800" dirty="0"/>
+              <a:t>- 商品紹介</a:t>
+            </a:r>
+          </a:p>
+          <a:p>
+            <a:pPr marL="685800" indent="-685800">
+              <a:buFontTx/>
+              <a:buChar char="-"/>
+            </a:pPr>
+            <a:r>
+              <a:rPr lang="ja-JP" altLang="ja-JP" sz="4800" dirty="0"/>
+              <a:t>営業時間</a:t>
+            </a:r>
+            <a:endParaRPr lang="en-US" altLang="ja-JP" sz="4800" dirty="0"/>
+          </a:p>
+          <a:p>
+            <a:pPr marL="685800" indent="-685800">
+              <a:buFontTx/>
+              <a:buChar char="-"/>
+            </a:pPr>
+            <a:r>
+              <a:rPr lang="ja-JP" altLang="ja-JP" sz="4800" dirty="0"/>
+              <a:t>QRコード</a:t>
+            </a:r>
+          </a:p>
+        </p:txBody>
+      </p:sp>
+      <p:sp>
+        <p:nvSpPr>
+          <p:cNvPr id="6" name="正方形/長方形 5">
+            <a:extLst>
+              <a:ext uri="{FF2B5EF4-FFF2-40B4-BE49-F238E27FC236}">
+                <a16:creationId xmlns:a16="http://schemas.microsoft.com/office/drawing/2014/main" id="{6237AD53-019B-EE6B-38CB-31824031F221}"/>
+              </a:ext>
+            </a:extLst>
+          </p:cNvPr>
+          <p:cNvSpPr/>
+          <p:nvPr/>
+        </p:nvSpPr>
+        <p:spPr>
+          <a:xfrm>
+            <a:off x="5183529" y="0"/>
+            <a:ext cx="6923590" cy="6811377"/>
+          </a:xfrm>
+          <a:prstGeom prst="rect">
+            <a:avLst/>
+          </a:prstGeom>
+          <a:solidFill>
+            <a:schemeClr val="bg1"/>
+          </a:solidFill>
+          <a:ln>
+            <a:solidFill>
+              <a:schemeClr val="bg1"/>
+            </a:solidFill>
+          </a:ln>
+        </p:spPr>
+        <p:style>
+          <a:lnRef idx="2">
+            <a:schemeClr val="accent1">
+              <a:shade val="15000"/>
+            </a:schemeClr>
+          </a:lnRef>
+          <a:fillRef idx="1">
+            <a:schemeClr val="accent1"/>
+          </a:fillRef>
+          <a:effectRef idx="0">
+            <a:schemeClr val="accent1"/>
+          </a:effectRef>
+          <a:fontRef idx="minor">
+            <a:schemeClr val="lt1"/>
+          </a:fontRef>
+        </p:style>
+        <p:txBody>
+          <a:bodyPr rtlCol="0" anchor="ctr"/>
+          <a:lstStyle/>
+          <a:p>
+            <a:pPr algn="ctr"/>
+            <a:endParaRPr kumimoji="1" lang="ja-JP" altLang="en-US" dirty="0">
+              <a:ln>
+                <a:solidFill>
+                  <a:schemeClr val="bg1"/>
+                </a:solidFill>
+              </a:ln>
+              <a:solidFill>
+                <a:schemeClr val="bg1"/>
+              </a:solidFill>
+            </a:endParaRPr>
+          </a:p>
+        </p:txBody>
+      </p:sp>
+      <p:sp>
+        <p:nvSpPr>
+          <p:cNvPr id="8" name="正方形/長方形 7">
+            <a:extLst>
+              <a:ext uri="{FF2B5EF4-FFF2-40B4-BE49-F238E27FC236}">
+                <a16:creationId xmlns:a16="http://schemas.microsoft.com/office/drawing/2014/main" id="{A5FE6106-75EE-3BD7-1D3B-25F9C8DDEA35}"/>
+              </a:ext>
+            </a:extLst>
+          </p:cNvPr>
+          <p:cNvSpPr/>
+          <p:nvPr/>
+        </p:nvSpPr>
+        <p:spPr>
+          <a:xfrm>
+            <a:off x="5294453" y="46623"/>
+            <a:ext cx="6701742" cy="1365813"/>
+          </a:xfrm>
+          <a:prstGeom prst="rect">
+            <a:avLst/>
+          </a:prstGeom>
+          <a:solidFill>
+            <a:schemeClr val="bg1"/>
+          </a:solidFill>
+        </p:spPr>
+        <p:style>
+          <a:lnRef idx="2">
+            <a:schemeClr val="accent1">
+              <a:shade val="15000"/>
+            </a:schemeClr>
+          </a:lnRef>
+          <a:fillRef idx="1">
+            <a:schemeClr val="accent1"/>
+          </a:fillRef>
+          <a:effectRef idx="0">
+            <a:schemeClr val="accent1"/>
+          </a:effectRef>
+          <a:fontRef idx="minor">
+            <a:schemeClr val="lt1"/>
+          </a:fontRef>
+        </p:style>
+        <p:txBody>
+          <a:bodyPr rtlCol="0" anchor="ctr"/>
+          <a:lstStyle/>
+          <a:p>
+            <a:pPr algn="ctr"/>
+            <a:r>
+              <a:rPr kumimoji="1" lang="ja-JP" altLang="en-US" sz="4400" dirty="0">
+                <a:solidFill>
+                  <a:schemeClr val="tx1"/>
+                </a:solidFill>
+              </a:rPr>
+              <a:t>タイトル</a:t>
+            </a:r>
+          </a:p>
+        </p:txBody>
+      </p:sp>
+      <p:sp>
+        <p:nvSpPr>
+          <p:cNvPr id="9" name="正方形/長方形 8">
+            <a:extLst>
+              <a:ext uri="{FF2B5EF4-FFF2-40B4-BE49-F238E27FC236}">
+                <a16:creationId xmlns:a16="http://schemas.microsoft.com/office/drawing/2014/main" id="{6B0B9830-0AB5-0C81-7681-0E238579DB59}"/>
+              </a:ext>
+            </a:extLst>
+          </p:cNvPr>
+          <p:cNvSpPr/>
+          <p:nvPr/>
+        </p:nvSpPr>
+        <p:spPr>
+          <a:xfrm>
+            <a:off x="5341395" y="1506204"/>
+            <a:ext cx="6654800" cy="1804264"/>
+          </a:xfrm>
+          <a:prstGeom prst="rect">
+            <a:avLst/>
+          </a:prstGeom>
+          <a:solidFill>
+            <a:schemeClr val="bg1"/>
+          </a:solidFill>
+        </p:spPr>
+        <p:style>
+          <a:lnRef idx="2">
+            <a:schemeClr val="accent1">
+              <a:shade val="15000"/>
+            </a:schemeClr>
+          </a:lnRef>
+          <a:fillRef idx="1">
+            <a:schemeClr val="accent1"/>
+          </a:fillRef>
+          <a:effectRef idx="0">
+            <a:schemeClr val="accent1"/>
+          </a:effectRef>
+          <a:fontRef idx="minor">
+            <a:schemeClr val="lt1"/>
+          </a:fontRef>
+        </p:style>
+        <p:txBody>
+          <a:bodyPr rtlCol="0" anchor="ctr"/>
+          <a:lstStyle/>
+          <a:p>
+            <a:pPr algn="ctr"/>
+            <a:r>
+              <a:rPr kumimoji="1" lang="ja-JP" altLang="en-US" sz="4400" dirty="0">
+                <a:solidFill>
+                  <a:schemeClr val="tx1"/>
+                </a:solidFill>
+              </a:rPr>
+              <a:t>果樹園の紹介</a:t>
+            </a:r>
+          </a:p>
+        </p:txBody>
+      </p:sp>
+      <p:sp>
+        <p:nvSpPr>
+          <p:cNvPr id="10" name="正方形/長方形 9">
+            <a:extLst>
+              <a:ext uri="{FF2B5EF4-FFF2-40B4-BE49-F238E27FC236}">
+                <a16:creationId xmlns:a16="http://schemas.microsoft.com/office/drawing/2014/main" id="{FD955D00-C3CE-1223-50BA-F0A75B83F9C3}"/>
+              </a:ext>
+            </a:extLst>
+          </p:cNvPr>
+          <p:cNvSpPr/>
+          <p:nvPr/>
+        </p:nvSpPr>
+        <p:spPr>
+          <a:xfrm>
+            <a:off x="5341395" y="3404236"/>
+            <a:ext cx="3194123" cy="1892569"/>
+          </a:xfrm>
+          <a:prstGeom prst="rect">
+            <a:avLst/>
+          </a:prstGeom>
+          <a:solidFill>
+            <a:schemeClr val="bg1"/>
+          </a:solidFill>
+        </p:spPr>
+        <p:style>
+          <a:lnRef idx="2">
+            <a:schemeClr val="accent1">
+              <a:shade val="15000"/>
+            </a:schemeClr>
+          </a:lnRef>
+          <a:fillRef idx="1">
+            <a:schemeClr val="accent1"/>
+          </a:fillRef>
+          <a:effectRef idx="0">
+            <a:schemeClr val="accent1"/>
+          </a:effectRef>
+          <a:fontRef idx="minor">
+            <a:schemeClr val="lt1"/>
+          </a:fontRef>
+        </p:style>
+        <p:txBody>
+          <a:bodyPr rtlCol="0" anchor="ctr"/>
+          <a:lstStyle/>
+          <a:p>
+            <a:pPr algn="ctr"/>
+            <a:r>
+              <a:rPr kumimoji="1" lang="ja-JP" altLang="en-US" dirty="0">
+                <a:solidFill>
+                  <a:schemeClr val="tx1"/>
+                </a:solidFill>
+              </a:rPr>
+              <a:t>果実紹介</a:t>
+            </a:r>
+          </a:p>
+        </p:txBody>
+      </p:sp>
+      <p:sp>
+        <p:nvSpPr>
+          <p:cNvPr id="12" name="正方形/長方形 11">
+            <a:extLst>
+              <a:ext uri="{FF2B5EF4-FFF2-40B4-BE49-F238E27FC236}">
+                <a16:creationId xmlns:a16="http://schemas.microsoft.com/office/drawing/2014/main" id="{B1B0A297-2D06-3492-4090-967AA55099CE}"/>
+              </a:ext>
+            </a:extLst>
+          </p:cNvPr>
+          <p:cNvSpPr/>
+          <p:nvPr/>
+        </p:nvSpPr>
+        <p:spPr>
+          <a:xfrm>
+            <a:off x="8547246" y="3404235"/>
+            <a:ext cx="3448949" cy="1892569"/>
+          </a:xfrm>
+          <a:prstGeom prst="rect">
+            <a:avLst/>
+          </a:prstGeom>
+          <a:solidFill>
+            <a:schemeClr val="bg1"/>
+          </a:solidFill>
+        </p:spPr>
+        <p:style>
+          <a:lnRef idx="2">
+            <a:schemeClr val="accent1">
+              <a:shade val="15000"/>
+            </a:schemeClr>
+          </a:lnRef>
+          <a:fillRef idx="1">
+            <a:schemeClr val="accent1"/>
+          </a:fillRef>
+          <a:effectRef idx="0">
+            <a:schemeClr val="accent1"/>
+          </a:effectRef>
+          <a:fontRef idx="minor">
+            <a:schemeClr val="lt1"/>
+          </a:fontRef>
+        </p:style>
+        <p:txBody>
+          <a:bodyPr rtlCol="0" anchor="ctr"/>
+          <a:lstStyle/>
+          <a:p>
+            <a:pPr algn="ctr"/>
+            <a:r>
+              <a:rPr kumimoji="1" lang="ja-JP" altLang="en-US" dirty="0">
+                <a:solidFill>
+                  <a:schemeClr val="tx1"/>
+                </a:solidFill>
+              </a:rPr>
+              <a:t>商品紹介</a:t>
+            </a:r>
+          </a:p>
+        </p:txBody>
+      </p:sp>
+      <p:sp>
+        <p:nvSpPr>
+          <p:cNvPr id="13" name="正方形/長方形 12">
+            <a:extLst>
+              <a:ext uri="{FF2B5EF4-FFF2-40B4-BE49-F238E27FC236}">
+                <a16:creationId xmlns:a16="http://schemas.microsoft.com/office/drawing/2014/main" id="{A55BD89D-F29C-03AD-EA9C-41A0CF77DA71}"/>
+              </a:ext>
+            </a:extLst>
+          </p:cNvPr>
+          <p:cNvSpPr/>
+          <p:nvPr/>
+        </p:nvSpPr>
+        <p:spPr>
+          <a:xfrm>
+            <a:off x="5341395" y="5492187"/>
+            <a:ext cx="6701742" cy="1365813"/>
+          </a:xfrm>
+          <a:prstGeom prst="rect">
+            <a:avLst/>
+          </a:prstGeom>
+          <a:solidFill>
+            <a:schemeClr val="bg1"/>
+          </a:solidFill>
+        </p:spPr>
+        <p:style>
+          <a:lnRef idx="2">
+            <a:schemeClr val="accent1">
+              <a:shade val="15000"/>
+            </a:schemeClr>
+          </a:lnRef>
+          <a:fillRef idx="1">
+            <a:schemeClr val="accent1"/>
+          </a:fillRef>
+          <a:effectRef idx="0">
+            <a:schemeClr val="accent1"/>
+          </a:effectRef>
+          <a:fontRef idx="minor">
+            <a:schemeClr val="lt1"/>
+          </a:fontRef>
+        </p:style>
+        <p:txBody>
+          <a:bodyPr rtlCol="0" anchor="ctr"/>
+          <a:lstStyle/>
+          <a:p>
+            <a:pPr algn="ctr"/>
+            <a:r>
+              <a:rPr kumimoji="1" lang="ja-JP" altLang="en-US" sz="4400" dirty="0">
+                <a:solidFill>
+                  <a:schemeClr val="tx1"/>
+                </a:solidFill>
+              </a:rPr>
+              <a:t>営業時間・</a:t>
+            </a:r>
+            <a:r>
+              <a:rPr kumimoji="1" lang="en-US" altLang="ja-JP" sz="4400" dirty="0">
+                <a:solidFill>
+                  <a:schemeClr val="tx1"/>
+                </a:solidFill>
+              </a:rPr>
+              <a:t>QR</a:t>
+            </a:r>
+            <a:r>
+              <a:rPr kumimoji="1" lang="ja-JP" altLang="en-US" sz="4400" dirty="0">
+                <a:solidFill>
+                  <a:schemeClr val="tx1"/>
+                </a:solidFill>
+              </a:rPr>
+              <a:t>コード</a:t>
+            </a:r>
+          </a:p>
+        </p:txBody>
+      </p:sp>
+    </p:spTree>
+    <p:extLst>
+      <p:ext uri="{BB962C8B-B14F-4D97-AF65-F5344CB8AC3E}">
+        <p14:creationId xmlns:p14="http://schemas.microsoft.com/office/powerpoint/2010/main" val="2463679976"/>
+      </p:ext>
+    </p:extLst>
+  </p:cSld>
+  <p:clrMapOvr>
+    <a:masterClrMapping/>
+  </p:clrMapOvr>
+</p:sld>
+</file>
+
+<file path=ppt/slides/slide11.xml><?xml version="1.0" encoding="utf-8"?>
+<p:sld xmlns:a="http://schemas.openxmlformats.org/drawingml/2006/main" xmlns:r="http://schemas.openxmlformats.org/officeDocument/2006/relationships" xmlns:p="http://schemas.openxmlformats.org/presentationml/2006/main">
+  <p:cSld>
+    <p:bg>
+      <p:bgPr>
+        <a:solidFill>
+          <a:schemeClr val="bg2"/>
+        </a:solidFill>
+        <a:effectLst/>
+      </p:bgPr>
+    </p:bg>
+    <p:spTree>
+      <p:nvGrpSpPr>
+        <p:cNvPr id="1" name=""/>
+        <p:cNvGrpSpPr/>
+        <p:nvPr/>
+      </p:nvGrpSpPr>
+      <p:grpSpPr>
+        <a:xfrm>
+          <a:off x="0" y="0"/>
+          <a:ext cx="0" cy="0"/>
+          <a:chOff x="0" y="0"/>
+          <a:chExt cx="0" cy="0"/>
+        </a:xfrm>
+      </p:grpSpPr>
+      <p:sp useBgFill="1">
+        <p:nvSpPr>
+          <p:cNvPr id="8" name="Rectangle 7">
+            <a:extLst>
+              <a:ext uri="{FF2B5EF4-FFF2-40B4-BE49-F238E27FC236}">
+                <a16:creationId xmlns:a16="http://schemas.microsoft.com/office/drawing/2014/main" id="{32812C54-7AEF-4ABB-826E-221F51CB0F30}"/>
+              </a:ext>
+              <a:ext uri="{C183D7F6-B498-43B3-948B-1728B52AA6E4}">
+                <adec:decorative xmlns:adec="http://schemas.microsoft.com/office/drawing/2017/decorative" val="1"/>
+              </a:ext>
+            </a:extLst>
+          </p:cNvPr>
+          <p:cNvSpPr>
+            <a:spLocks noGrp="1" noRot="1" noChangeAspect="1" noMove="1" noResize="1" noEditPoints="1" noAdjustHandles="1" noChangeArrowheads="1" noChangeShapeType="1" noTextEdit="1"/>
+          </p:cNvSpPr>
+          <p:nvPr>
+            <p:extLst>
+              <p:ext uri="{386F3935-93C4-4BCD-93E2-E3B085C9AB24}">
+                <p16:designElem xmlns:p16="http://schemas.microsoft.com/office/powerpoint/2015/main" val="1"/>
+              </p:ext>
+            </p:extLst>
+          </p:nvPr>
+        </p:nvSpPr>
+        <p:spPr>
+          <a:xfrm>
+            <a:off x="0" y="0"/>
+            <a:ext cx="12192000" cy="6858000"/>
+          </a:xfrm>
+          <a:prstGeom prst="rect">
+            <a:avLst/>
+          </a:prstGeom>
+          <a:ln>
+            <a:noFill/>
+          </a:ln>
+        </p:spPr>
+        <p:style>
+          <a:lnRef idx="2">
+            <a:schemeClr val="accent1">
+              <a:shade val="50000"/>
+            </a:schemeClr>
+          </a:lnRef>
+          <a:fillRef idx="1">
+            <a:schemeClr val="accent1"/>
+          </a:fillRef>
+          <a:effectRef idx="0">
+            <a:schemeClr val="accent1"/>
+          </a:effectRef>
+          <a:fontRef idx="minor">
+            <a:schemeClr val="lt1"/>
+          </a:fontRef>
+        </p:style>
+        <p:txBody>
+          <a:bodyPr rtlCol="0" anchor="ctr"/>
+          <a:lstStyle/>
+          <a:p>
+            <a:pPr algn="ctr"/>
+            <a:endParaRPr lang="en-US"/>
+          </a:p>
+        </p:txBody>
+      </p:sp>
+      <p:sp>
+        <p:nvSpPr>
+          <p:cNvPr id="10" name="Rectangle 9">
+            <a:extLst>
+              <a:ext uri="{FF2B5EF4-FFF2-40B4-BE49-F238E27FC236}">
+                <a16:creationId xmlns:a16="http://schemas.microsoft.com/office/drawing/2014/main" id="{891F40E4-8A76-44CF-91EC-907367352626}"/>
+              </a:ext>
+              <a:ext uri="{C183D7F6-B498-43B3-948B-1728B52AA6E4}">
+                <adec:decorative xmlns:adec="http://schemas.microsoft.com/office/drawing/2017/decorative" val="1"/>
+              </a:ext>
+            </a:extLst>
+          </p:cNvPr>
+          <p:cNvSpPr>
+            <a:spLocks noGrp="1" noRot="1" noChangeAspect="1" noMove="1" noResize="1" noEditPoints="1" noAdjustHandles="1" noChangeArrowheads="1" noChangeShapeType="1" noTextEdit="1"/>
+          </p:cNvSpPr>
+          <p:nvPr>
+            <p:extLst>
+              <p:ext uri="{386F3935-93C4-4BCD-93E2-E3B085C9AB24}">
+                <p16:designElem xmlns:p16="http://schemas.microsoft.com/office/powerpoint/2015/main" val="1"/>
+              </p:ext>
+            </p:extLst>
+          </p:nvPr>
+        </p:nvSpPr>
+        <p:spPr>
+          <a:xfrm>
+            <a:off x="1" y="376"/>
+            <a:ext cx="3044410" cy="6857624"/>
+          </a:xfrm>
+          <a:prstGeom prst="rect">
+            <a:avLst/>
+          </a:prstGeom>
+          <a:solidFill>
+            <a:schemeClr val="accent1"/>
+          </a:solidFill>
+          <a:ln>
+            <a:noFill/>
+          </a:ln>
+        </p:spPr>
+        <p:style>
+          <a:lnRef idx="2">
+            <a:schemeClr val="accent1">
+              <a:shade val="50000"/>
+            </a:schemeClr>
+          </a:lnRef>
+          <a:fillRef idx="1">
+            <a:schemeClr val="accent1"/>
+          </a:fillRef>
+          <a:effectRef idx="0">
+            <a:schemeClr val="accent1"/>
+          </a:effectRef>
+          <a:fontRef idx="minor">
+            <a:schemeClr val="lt1"/>
+          </a:fontRef>
+        </p:style>
+        <p:txBody>
+          <a:bodyPr/>
+          <a:lstStyle/>
+          <a:p>
+            <a:endParaRPr lang="ja-JP" altLang="en-US"/>
+          </a:p>
+        </p:txBody>
+      </p:sp>
+      <p:sp>
+        <p:nvSpPr>
+          <p:cNvPr id="12" name="Rectangle 11">
+            <a:extLst>
+              <a:ext uri="{FF2B5EF4-FFF2-40B4-BE49-F238E27FC236}">
+                <a16:creationId xmlns:a16="http://schemas.microsoft.com/office/drawing/2014/main" id="{72171013-D973-4187-9CF2-EE098EEF8194}"/>
+              </a:ext>
+              <a:ext uri="{C183D7F6-B498-43B3-948B-1728B52AA6E4}">
+                <adec:decorative xmlns:adec="http://schemas.microsoft.com/office/drawing/2017/decorative" val="1"/>
+              </a:ext>
+            </a:extLst>
+          </p:cNvPr>
+          <p:cNvSpPr>
+            <a:spLocks noGrp="1" noRot="1" noChangeAspect="1" noMove="1" noResize="1" noEditPoints="1" noAdjustHandles="1" noChangeArrowheads="1" noChangeShapeType="1" noTextEdit="1"/>
+          </p:cNvSpPr>
+          <p:nvPr>
+            <p:extLst>
+              <p:ext uri="{386F3935-93C4-4BCD-93E2-E3B085C9AB24}">
+                <p16:designElem xmlns:p16="http://schemas.microsoft.com/office/powerpoint/2015/main" val="1"/>
+              </p:ext>
+            </p:extLst>
+          </p:nvPr>
+        </p:nvSpPr>
+        <p:spPr>
+          <a:xfrm>
+            <a:off x="2815810" y="376"/>
+            <a:ext cx="228600" cy="6858000"/>
+          </a:xfrm>
+          <a:prstGeom prst="rect">
+            <a:avLst/>
+          </a:prstGeom>
+          <a:solidFill>
+            <a:schemeClr val="tx2"/>
+          </a:solidFill>
+          <a:ln>
+            <a:noFill/>
+          </a:ln>
+        </p:spPr>
+        <p:style>
+          <a:lnRef idx="2">
+            <a:schemeClr val="accent1">
+              <a:shade val="50000"/>
+            </a:schemeClr>
+          </a:lnRef>
+          <a:fillRef idx="1">
+            <a:schemeClr val="accent1"/>
+          </a:fillRef>
+          <a:effectRef idx="0">
+            <a:schemeClr val="accent1"/>
+          </a:effectRef>
+          <a:fontRef idx="minor">
+            <a:schemeClr val="lt1"/>
+          </a:fontRef>
+        </p:style>
+        <p:txBody>
+          <a:bodyPr/>
+          <a:lstStyle/>
+          <a:p>
+            <a:endParaRPr lang="ja-JP" altLang="en-US"/>
+          </a:p>
+        </p:txBody>
+      </p:sp>
+      <p:sp>
+        <p:nvSpPr>
+          <p:cNvPr id="3" name="コンテンツ プレースホルダー 2">
+            <a:extLst>
+              <a:ext uri="{FF2B5EF4-FFF2-40B4-BE49-F238E27FC236}">
+                <a16:creationId xmlns:a16="http://schemas.microsoft.com/office/drawing/2014/main" id="{8EC7EAAE-7792-303F-4F84-76277414BE78}"/>
+              </a:ext>
+            </a:extLst>
+          </p:cNvPr>
+          <p:cNvSpPr>
+            <a:spLocks noGrp="1"/>
+          </p:cNvSpPr>
+          <p:nvPr>
+            <p:ph idx="1"/>
+          </p:nvPr>
+        </p:nvSpPr>
+        <p:spPr>
+          <a:xfrm>
+            <a:off x="3313064" y="2226868"/>
+            <a:ext cx="7705164" cy="2877568"/>
+          </a:xfrm>
+        </p:spPr>
+        <p:txBody>
+          <a:bodyPr>
+            <a:noAutofit/>
+          </a:bodyPr>
+          <a:lstStyle/>
+          <a:p>
+            <a:r>
+              <a:rPr kumimoji="1" lang="ja-JP" altLang="en-US" sz="3200" dirty="0"/>
+              <a:t>７月　　　　　デザイン案を制作　</a:t>
+            </a:r>
+            <a:endParaRPr kumimoji="1" lang="en-US" altLang="ja-JP" sz="3200" dirty="0"/>
+          </a:p>
+          <a:p>
+            <a:r>
+              <a:rPr lang="ja-JP" altLang="en-US" sz="3200" dirty="0"/>
+              <a:t>８月　　　　　素材集め・加工編集</a:t>
+            </a:r>
+            <a:endParaRPr lang="en-US" altLang="ja-JP" sz="3200" dirty="0"/>
+          </a:p>
+          <a:p>
+            <a:r>
+              <a:rPr kumimoji="1" lang="ja-JP" altLang="en-US" sz="3200" dirty="0"/>
+              <a:t>９月～１１月　</a:t>
+            </a:r>
+            <a:r>
+              <a:rPr lang="en-US" altLang="ja-JP" sz="3200" dirty="0"/>
+              <a:t>Web</a:t>
+            </a:r>
+            <a:r>
+              <a:rPr lang="ja-JP" altLang="en-US" sz="3200" dirty="0"/>
+              <a:t>サイト制作</a:t>
+            </a:r>
+            <a:endParaRPr kumimoji="1" lang="en-US" altLang="ja-JP" sz="3200" dirty="0"/>
+          </a:p>
+          <a:p>
+            <a:r>
+              <a:rPr lang="ja-JP" altLang="en-US" sz="3200" dirty="0"/>
+              <a:t>１２月　　　　最終確認</a:t>
+            </a:r>
+            <a:endParaRPr lang="en-US" altLang="ja-JP" sz="3200" dirty="0"/>
+          </a:p>
+        </p:txBody>
+      </p:sp>
+      <p:sp>
+        <p:nvSpPr>
+          <p:cNvPr id="2" name="タイトル 1">
+            <a:extLst>
+              <a:ext uri="{FF2B5EF4-FFF2-40B4-BE49-F238E27FC236}">
+                <a16:creationId xmlns:a16="http://schemas.microsoft.com/office/drawing/2014/main" id="{597DBDC4-8E7F-6F8D-BFB0-82D9C9230D0B}"/>
+              </a:ext>
+            </a:extLst>
+          </p:cNvPr>
+          <p:cNvSpPr>
+            <a:spLocks noGrp="1"/>
+          </p:cNvSpPr>
+          <p:nvPr>
+            <p:ph type="title"/>
+          </p:nvPr>
+        </p:nvSpPr>
+        <p:spPr>
+          <a:xfrm>
+            <a:off x="-79632" y="3016250"/>
+            <a:ext cx="7705164" cy="1485900"/>
+          </a:xfrm>
+        </p:spPr>
+        <p:txBody>
+          <a:bodyPr>
+            <a:normAutofit/>
+          </a:bodyPr>
+          <a:lstStyle/>
+          <a:p>
+            <a:r>
+              <a:rPr kumimoji="1" lang="ja-JP" altLang="en-US" b="1" dirty="0">
+                <a:solidFill>
+                  <a:schemeClr val="bg1"/>
+                </a:solidFill>
+              </a:rPr>
+              <a:t>今後の流れ</a:t>
+            </a:r>
+          </a:p>
+        </p:txBody>
+      </p:sp>
+    </p:spTree>
+    <p:extLst>
+      <p:ext uri="{BB962C8B-B14F-4D97-AF65-F5344CB8AC3E}">
+        <p14:creationId xmlns:p14="http://schemas.microsoft.com/office/powerpoint/2010/main" val="2363498668"/>
       </p:ext>
     </p:extLst>
   </p:cSld>
@@ -4261,12 +5096,12 @@
           <a:chExt cx="0" cy="0"/>
         </a:xfrm>
       </p:grpSpPr>
-      <p:sp>
-        <p:nvSpPr>
-          <p:cNvPr id="16" name="Rectangle 7">
+      <p:sp useBgFill="1">
+        <p:nvSpPr>
+          <p:cNvPr id="8" name="Rectangle 7">
             <a:extLst>
               <a:ext uri="{FF2B5EF4-FFF2-40B4-BE49-F238E27FC236}">
-                <a16:creationId xmlns:a16="http://schemas.microsoft.com/office/drawing/2014/main" id="{3362DFFC-4DCC-48EE-B781-94D04B95F1E8}"/>
+                <a16:creationId xmlns:a16="http://schemas.microsoft.com/office/drawing/2014/main" id="{32812C54-7AEF-4ABB-826E-221F51CB0F30}"/>
               </a:ext>
               <a:ext uri="{C183D7F6-B498-43B3-948B-1728B52AA6E4}">
                 <adec:decorative xmlns:adec="http://schemas.microsoft.com/office/drawing/2017/decorative" val="1"/>
@@ -4286,15 +5121,12 @@
         </p:nvSpPr>
         <p:spPr>
           <a:xfrm>
-            <a:off x="0" y="376"/>
-            <a:ext cx="5303520" cy="6857624"/>
+            <a:off x="0" y="0"/>
+            <a:ext cx="12192000" cy="6858000"/>
           </a:xfrm>
           <a:prstGeom prst="rect">
             <a:avLst/>
           </a:prstGeom>
-          <a:solidFill>
-            <a:schemeClr val="tx2"/>
-          </a:solidFill>
           <a:ln>
             <a:noFill/>
           </a:ln>
@@ -4316,59 +5148,20 @@
           </a:fontRef>
         </p:style>
         <p:txBody>
-          <a:bodyPr/>
-          <a:lstStyle/>
-          <a:p>
-            <a:endParaRPr lang="ja-JP" altLang="en-US"/>
-          </a:p>
-        </p:txBody>
-      </p:sp>
-      <p:sp>
-        <p:nvSpPr>
-          <p:cNvPr id="2" name="タイトル 1">
+          <a:bodyPr rtlCol="0" anchor="ctr"/>
+          <a:lstStyle/>
+          <a:p>
+            <a:pPr algn="ctr"/>
+            <a:endParaRPr lang="en-US"/>
+          </a:p>
+        </p:txBody>
+      </p:sp>
+      <p:sp>
+        <p:nvSpPr>
+          <p:cNvPr id="10" name="Rectangle 9">
             <a:extLst>
               <a:ext uri="{FF2B5EF4-FFF2-40B4-BE49-F238E27FC236}">
-                <a16:creationId xmlns:a16="http://schemas.microsoft.com/office/drawing/2014/main" id="{ABAF9C15-50FD-2963-A1F2-057FD20F38AF}"/>
-              </a:ext>
-            </a:extLst>
-          </p:cNvPr>
-          <p:cNvSpPr>
-            <a:spLocks noGrp="1"/>
-          </p:cNvSpPr>
-          <p:nvPr>
-            <p:ph type="title"/>
-          </p:nvPr>
-        </p:nvSpPr>
-        <p:spPr>
-          <a:xfrm>
-            <a:off x="640081" y="791570"/>
-            <a:ext cx="4018839" cy="5262390"/>
-          </a:xfrm>
-        </p:spPr>
-        <p:txBody>
-          <a:bodyPr anchor="ctr">
-            <a:normAutofit/>
-          </a:bodyPr>
-          <a:lstStyle/>
-          <a:p>
-            <a:pPr algn="ctr"/>
-            <a:r>
-              <a:rPr kumimoji="1" lang="ja-JP" altLang="en-US" sz="6000" b="1" dirty="0">
-                <a:solidFill>
-                  <a:schemeClr val="bg2"/>
-                </a:solidFill>
-              </a:rPr>
-              <a:t>テーマ１</a:t>
-            </a:r>
-          </a:p>
-        </p:txBody>
-      </p:sp>
-      <p:sp>
-        <p:nvSpPr>
-          <p:cNvPr id="17" name="Rectangle 9">
-            <a:extLst>
-              <a:ext uri="{FF2B5EF4-FFF2-40B4-BE49-F238E27FC236}">
-                <a16:creationId xmlns:a16="http://schemas.microsoft.com/office/drawing/2014/main" id="{18B8B265-E68C-4B64-9238-781F0102C57B}"/>
+                <a16:creationId xmlns:a16="http://schemas.microsoft.com/office/drawing/2014/main" id="{891F40E4-8A76-44CF-91EC-907367352626}"/>
               </a:ext>
               <a:ext uri="{C183D7F6-B498-43B3-948B-1728B52AA6E4}">
                 <adec:decorative xmlns:adec="http://schemas.microsoft.com/office/drawing/2017/decorative" val="1"/>
@@ -4388,16 +5181,14 @@
         </p:nvSpPr>
         <p:spPr>
           <a:xfrm>
-            <a:off x="5303520" y="376"/>
-            <a:ext cx="228600" cy="6858000"/>
+            <a:off x="1" y="376"/>
+            <a:ext cx="3044410" cy="6857624"/>
           </a:xfrm>
           <a:prstGeom prst="rect">
             <a:avLst/>
           </a:prstGeom>
           <a:solidFill>
-            <a:schemeClr val="accent1">
-              <a:lumMod val="75000"/>
-            </a:schemeClr>
+            <a:schemeClr val="accent1"/>
           </a:solidFill>
           <a:ln>
             <a:noFill/>
@@ -4429,10 +5220,72 @@
       </p:sp>
       <p:sp>
         <p:nvSpPr>
+          <p:cNvPr id="12" name="Rectangle 11">
+            <a:extLst>
+              <a:ext uri="{FF2B5EF4-FFF2-40B4-BE49-F238E27FC236}">
+                <a16:creationId xmlns:a16="http://schemas.microsoft.com/office/drawing/2014/main" id="{72171013-D973-4187-9CF2-EE098EEF8194}"/>
+              </a:ext>
+              <a:ext uri="{C183D7F6-B498-43B3-948B-1728B52AA6E4}">
+                <adec:decorative xmlns:adec="http://schemas.microsoft.com/office/drawing/2017/decorative" val="1"/>
+              </a:ext>
+            </a:extLst>
+          </p:cNvPr>
+          <p:cNvSpPr>
+            <a:spLocks noGrp="1" noRot="1" noChangeAspect="1" noMove="1" noResize="1" noEditPoints="1" noAdjustHandles="1" noChangeArrowheads="1" noChangeShapeType="1" noTextEdit="1"/>
+          </p:cNvSpPr>
+          <p:nvPr>
+            <p:extLst>
+              <p:ext uri="{386F3935-93C4-4BCD-93E2-E3B085C9AB24}">
+                <p16:designElem xmlns:p16="http://schemas.microsoft.com/office/powerpoint/2015/main" val="1"/>
+              </p:ext>
+            </p:extLst>
+          </p:nvPr>
+        </p:nvSpPr>
+        <p:spPr>
+          <a:xfrm>
+            <a:off x="2815810" y="376"/>
+            <a:ext cx="228600" cy="6858000"/>
+          </a:xfrm>
+          <a:prstGeom prst="rect">
+            <a:avLst/>
+          </a:prstGeom>
+          <a:solidFill>
+            <a:schemeClr val="tx2"/>
+          </a:solidFill>
+          <a:ln>
+            <a:noFill/>
+          </a:ln>
+        </p:spPr>
+        <p:style>
+          <a:lnRef idx="2">
+            <a:schemeClr val="accent1">
+              <a:shade val="50000"/>
+            </a:schemeClr>
+          </a:lnRef>
+          <a:fillRef idx="1">
+            <a:schemeClr val="accent1"/>
+          </a:fillRef>
+          <a:effectRef idx="0">
+            <a:schemeClr val="accent1"/>
+          </a:effectRef>
+          <a:fontRef idx="minor">
+            <a:schemeClr val="lt1"/>
+          </a:fontRef>
+        </p:style>
+        <p:txBody>
+          <a:bodyPr/>
+          <a:lstStyle/>
+          <a:p>
+            <a:endParaRPr lang="ja-JP" altLang="en-US"/>
+          </a:p>
+        </p:txBody>
+      </p:sp>
+      <p:sp>
+        <p:nvSpPr>
           <p:cNvPr id="3" name="コンテンツ プレースホルダー 2">
             <a:extLst>
               <a:ext uri="{FF2B5EF4-FFF2-40B4-BE49-F238E27FC236}">
-                <a16:creationId xmlns:a16="http://schemas.microsoft.com/office/drawing/2014/main" id="{5F489C16-72D5-2F40-02DA-DF1D70B160AA}"/>
+                <a16:creationId xmlns:a16="http://schemas.microsoft.com/office/drawing/2014/main" id="{15ADD702-1181-237C-4D3B-47B481889467}"/>
               </a:ext>
             </a:extLst>
           </p:cNvPr>
@@ -4445,23 +5298,81 @@
         </p:nvSpPr>
         <p:spPr>
           <a:xfrm>
-            <a:off x="5664200" y="541867"/>
-            <a:ext cx="6350000" cy="5512093"/>
-          </a:xfrm>
-        </p:spPr>
-        <p:txBody>
-          <a:bodyPr anchor="ctr">
-            <a:normAutofit/>
+            <a:off x="4592163" y="1221475"/>
+            <a:ext cx="8250380" cy="4415050"/>
+          </a:xfrm>
+        </p:spPr>
+        <p:txBody>
+          <a:bodyPr>
+            <a:noAutofit/>
           </a:bodyPr>
           <a:lstStyle/>
           <a:p>
             <a:r>
-              <a:rPr kumimoji="1" lang="en-US" altLang="ja-JP" sz="7200" dirty="0"/>
-              <a:t>PC</a:t>
-            </a:r>
-            <a:r>
-              <a:rPr kumimoji="1" lang="ja-JP" altLang="en-US" sz="7200" dirty="0"/>
-              <a:t>のスペック紹介サイト</a:t>
+              <a:rPr kumimoji="1" lang="ja-JP" altLang="en-US" sz="6000" dirty="0"/>
+              <a:t>テーマ</a:t>
+            </a:r>
+            <a:endParaRPr kumimoji="1" lang="en-US" altLang="ja-JP" sz="6000" dirty="0"/>
+          </a:p>
+          <a:p>
+            <a:r>
+              <a:rPr lang="ja-JP" altLang="en-US" sz="6000" dirty="0"/>
+              <a:t>目的</a:t>
+            </a:r>
+            <a:endParaRPr lang="en-US" altLang="ja-JP" sz="6000" dirty="0"/>
+          </a:p>
+          <a:p>
+            <a:r>
+              <a:rPr kumimoji="1" lang="ja-JP" altLang="en-US" sz="6000" dirty="0"/>
+              <a:t>内容</a:t>
+            </a:r>
+            <a:endParaRPr kumimoji="1" lang="en-US" altLang="ja-JP" sz="6000" dirty="0"/>
+          </a:p>
+          <a:p>
+            <a:r>
+              <a:rPr lang="ja-JP" altLang="en-US" sz="6000" dirty="0"/>
+              <a:t>今後の流れ</a:t>
+            </a:r>
+            <a:endParaRPr kumimoji="1" lang="ja-JP" altLang="en-US" sz="6000" dirty="0"/>
+          </a:p>
+        </p:txBody>
+      </p:sp>
+      <p:sp>
+        <p:nvSpPr>
+          <p:cNvPr id="2" name="タイトル 1">
+            <a:extLst>
+              <a:ext uri="{FF2B5EF4-FFF2-40B4-BE49-F238E27FC236}">
+                <a16:creationId xmlns:a16="http://schemas.microsoft.com/office/drawing/2014/main" id="{5D6C8FA2-CCA1-79B6-A60E-449F8B7DDF67}"/>
+              </a:ext>
+            </a:extLst>
+          </p:cNvPr>
+          <p:cNvSpPr>
+            <a:spLocks noGrp="1"/>
+          </p:cNvSpPr>
+          <p:nvPr>
+            <p:ph type="title"/>
+          </p:nvPr>
+        </p:nvSpPr>
+        <p:spPr>
+          <a:xfrm>
+            <a:off x="-339659" y="2984500"/>
+            <a:ext cx="3384069" cy="1092200"/>
+          </a:xfrm>
+        </p:spPr>
+        <p:txBody>
+          <a:bodyPr>
+            <a:normAutofit fontScale="90000"/>
+          </a:bodyPr>
+          <a:lstStyle/>
+          <a:p>
+            <a:pPr algn="ctr"/>
+            <a:r>
+              <a:rPr kumimoji="1" lang="ja-JP" altLang="en-US" sz="7200" b="1" dirty="0">
+                <a:solidFill>
+                  <a:schemeClr val="bg1"/>
+                </a:solidFill>
+              </a:rPr>
+              <a:t>もくじ</a:t>
             </a:r>
           </a:p>
         </p:txBody>
@@ -4469,7 +5380,7 @@
     </p:spTree>
     <p:extLst>
       <p:ext uri="{BB962C8B-B14F-4D97-AF65-F5344CB8AC3E}">
-        <p14:creationId xmlns:p14="http://schemas.microsoft.com/office/powerpoint/2010/main" val="1705222227"/>
+        <p14:creationId xmlns:p14="http://schemas.microsoft.com/office/powerpoint/2010/main" val="357565137"/>
       </p:ext>
     </p:extLst>
   </p:cSld>
@@ -4482,6 +5393,14 @@
 <file path=ppt/slides/slide3.xml><?xml version="1.0" encoding="utf-8"?>
 <p:sld xmlns:a="http://schemas.openxmlformats.org/drawingml/2006/main" xmlns:r="http://schemas.openxmlformats.org/officeDocument/2006/relationships" xmlns:p="http://schemas.openxmlformats.org/presentationml/2006/main">
   <p:cSld>
+    <p:bg>
+      <p:bgPr>
+        <a:solidFill>
+          <a:schemeClr val="bg2"/>
+        </a:solidFill>
+        <a:effectLst/>
+      </p:bgPr>
+    </p:bg>
     <p:spTree>
       <p:nvGrpSpPr>
         <p:cNvPr id="1" name=""/>
@@ -4498,10 +5417,72 @@
       </p:grpSpPr>
       <p:sp>
         <p:nvSpPr>
+          <p:cNvPr id="16" name="Rectangle 7">
+            <a:extLst>
+              <a:ext uri="{FF2B5EF4-FFF2-40B4-BE49-F238E27FC236}">
+                <a16:creationId xmlns:a16="http://schemas.microsoft.com/office/drawing/2014/main" id="{3362DFFC-4DCC-48EE-B781-94D04B95F1E8}"/>
+              </a:ext>
+              <a:ext uri="{C183D7F6-B498-43B3-948B-1728B52AA6E4}">
+                <adec:decorative xmlns:adec="http://schemas.microsoft.com/office/drawing/2017/decorative" val="1"/>
+              </a:ext>
+            </a:extLst>
+          </p:cNvPr>
+          <p:cNvSpPr>
+            <a:spLocks noGrp="1" noRot="1" noChangeAspect="1" noMove="1" noResize="1" noEditPoints="1" noAdjustHandles="1" noChangeArrowheads="1" noChangeShapeType="1" noTextEdit="1"/>
+          </p:cNvSpPr>
+          <p:nvPr>
+            <p:extLst>
+              <p:ext uri="{386F3935-93C4-4BCD-93E2-E3B085C9AB24}">
+                <p16:designElem xmlns:p16="http://schemas.microsoft.com/office/powerpoint/2015/main" val="1"/>
+              </p:ext>
+            </p:extLst>
+          </p:nvPr>
+        </p:nvSpPr>
+        <p:spPr>
+          <a:xfrm>
+            <a:off x="0" y="376"/>
+            <a:ext cx="5303520" cy="6857624"/>
+          </a:xfrm>
+          <a:prstGeom prst="rect">
+            <a:avLst/>
+          </a:prstGeom>
+          <a:solidFill>
+            <a:schemeClr val="tx2"/>
+          </a:solidFill>
+          <a:ln>
+            <a:noFill/>
+          </a:ln>
+        </p:spPr>
+        <p:style>
+          <a:lnRef idx="2">
+            <a:schemeClr val="accent1">
+              <a:shade val="50000"/>
+            </a:schemeClr>
+          </a:lnRef>
+          <a:fillRef idx="1">
+            <a:schemeClr val="accent1"/>
+          </a:fillRef>
+          <a:effectRef idx="0">
+            <a:schemeClr val="accent1"/>
+          </a:effectRef>
+          <a:fontRef idx="minor">
+            <a:schemeClr val="lt1"/>
+          </a:fontRef>
+        </p:style>
+        <p:txBody>
+          <a:bodyPr/>
+          <a:lstStyle/>
+          <a:p>
+            <a:endParaRPr lang="ja-JP" altLang="en-US"/>
+          </a:p>
+        </p:txBody>
+      </p:sp>
+      <p:sp>
+        <p:nvSpPr>
           <p:cNvPr id="2" name="タイトル 1">
             <a:extLst>
               <a:ext uri="{FF2B5EF4-FFF2-40B4-BE49-F238E27FC236}">
-                <a16:creationId xmlns:a16="http://schemas.microsoft.com/office/drawing/2014/main" id="{B546DA2C-6AE6-5260-6AB3-28CF848D8197}"/>
+                <a16:creationId xmlns:a16="http://schemas.microsoft.com/office/drawing/2014/main" id="{ABAF9C15-50FD-2963-A1F2-057FD20F38AF}"/>
               </a:ext>
             </a:extLst>
           </p:cNvPr>
@@ -4514,18 +5495,89 @@
         </p:nvSpPr>
         <p:spPr>
           <a:xfrm>
-            <a:off x="1295400" y="436034"/>
-            <a:ext cx="9601200" cy="1485900"/>
-          </a:xfrm>
-        </p:spPr>
+            <a:off x="640081" y="791570"/>
+            <a:ext cx="4018839" cy="5262390"/>
+          </a:xfrm>
+        </p:spPr>
+        <p:txBody>
+          <a:bodyPr anchor="ctr">
+            <a:normAutofit/>
+          </a:bodyPr>
+          <a:lstStyle/>
+          <a:p>
+            <a:pPr algn="ctr"/>
+            <a:r>
+              <a:rPr kumimoji="1" lang="ja-JP" altLang="en-US" sz="6000" b="1" dirty="0">
+                <a:solidFill>
+                  <a:schemeClr val="bg2"/>
+                </a:solidFill>
+              </a:rPr>
+              <a:t>テーマ１</a:t>
+            </a:r>
+          </a:p>
+        </p:txBody>
+      </p:sp>
+      <p:sp>
+        <p:nvSpPr>
+          <p:cNvPr id="17" name="Rectangle 9">
+            <a:extLst>
+              <a:ext uri="{FF2B5EF4-FFF2-40B4-BE49-F238E27FC236}">
+                <a16:creationId xmlns:a16="http://schemas.microsoft.com/office/drawing/2014/main" id="{18B8B265-E68C-4B64-9238-781F0102C57B}"/>
+              </a:ext>
+              <a:ext uri="{C183D7F6-B498-43B3-948B-1728B52AA6E4}">
+                <adec:decorative xmlns:adec="http://schemas.microsoft.com/office/drawing/2017/decorative" val="1"/>
+              </a:ext>
+            </a:extLst>
+          </p:cNvPr>
+          <p:cNvSpPr>
+            <a:spLocks noGrp="1" noRot="1" noChangeAspect="1" noMove="1" noResize="1" noEditPoints="1" noAdjustHandles="1" noChangeArrowheads="1" noChangeShapeType="1" noTextEdit="1"/>
+          </p:cNvSpPr>
+          <p:nvPr>
+            <p:extLst>
+              <p:ext uri="{386F3935-93C4-4BCD-93E2-E3B085C9AB24}">
+                <p16:designElem xmlns:p16="http://schemas.microsoft.com/office/powerpoint/2015/main" val="1"/>
+              </p:ext>
+            </p:extLst>
+          </p:nvPr>
+        </p:nvSpPr>
+        <p:spPr>
+          <a:xfrm>
+            <a:off x="5303520" y="376"/>
+            <a:ext cx="228600" cy="6858000"/>
+          </a:xfrm>
+          <a:prstGeom prst="rect">
+            <a:avLst/>
+          </a:prstGeom>
+          <a:solidFill>
+            <a:schemeClr val="accent1">
+              <a:lumMod val="75000"/>
+            </a:schemeClr>
+          </a:solidFill>
+          <a:ln>
+            <a:noFill/>
+          </a:ln>
+        </p:spPr>
+        <p:style>
+          <a:lnRef idx="2">
+            <a:schemeClr val="accent1">
+              <a:shade val="50000"/>
+            </a:schemeClr>
+          </a:lnRef>
+          <a:fillRef idx="1">
+            <a:schemeClr val="accent1"/>
+          </a:fillRef>
+          <a:effectRef idx="0">
+            <a:schemeClr val="accent1"/>
+          </a:effectRef>
+          <a:fontRef idx="minor">
+            <a:schemeClr val="lt1"/>
+          </a:fontRef>
+        </p:style>
         <p:txBody>
           <a:bodyPr/>
           <a:lstStyle/>
           <a:p>
-            <a:r>
-              <a:rPr kumimoji="1" lang="ja-JP" altLang="en-US" dirty="0"/>
-              <a:t>背景・目的</a:t>
-            </a:r>
+            <a:endParaRPr lang="ja-JP" altLang="en-US"/>
           </a:p>
         </p:txBody>
       </p:sp>
@@ -4534,7 +5586,7 @@
           <p:cNvPr id="3" name="コンテンツ プレースホルダー 2">
             <a:extLst>
               <a:ext uri="{FF2B5EF4-FFF2-40B4-BE49-F238E27FC236}">
-                <a16:creationId xmlns:a16="http://schemas.microsoft.com/office/drawing/2014/main" id="{084A4DAF-F98E-C3DE-A20A-16EDB1CE4E5E}"/>
+                <a16:creationId xmlns:a16="http://schemas.microsoft.com/office/drawing/2014/main" id="{5F489C16-72D5-2F40-02DA-DF1D70B160AA}"/>
               </a:ext>
             </a:extLst>
           </p:cNvPr>
@@ -4547,47 +5599,23 @@
         </p:nvSpPr>
         <p:spPr>
           <a:xfrm>
-            <a:off x="965200" y="1921934"/>
-            <a:ext cx="9533467" cy="3581400"/>
-          </a:xfrm>
-        </p:spPr>
-        <p:txBody>
-          <a:bodyPr>
+            <a:off x="5664200" y="541867"/>
+            <a:ext cx="6350000" cy="5512093"/>
+          </a:xfrm>
+        </p:spPr>
+        <p:txBody>
+          <a:bodyPr anchor="ctr">
             <a:normAutofit/>
           </a:bodyPr>
           <a:lstStyle/>
           <a:p>
             <a:r>
-              <a:rPr lang="ja-JP" altLang="ja-JP" sz="5400" dirty="0"/>
-              <a:t>・PC初心者でもスペック</a:t>
-            </a:r>
-            <a:r>
-              <a:rPr lang="ja-JP" altLang="en-US" sz="5400" dirty="0"/>
-              <a:t>が　　</a:t>
-            </a:r>
-            <a:r>
-              <a:rPr lang="ja-JP" altLang="ja-JP" sz="5400" dirty="0"/>
-              <a:t>理解できるサイト制作</a:t>
-            </a:r>
-          </a:p>
-          <a:p>
-            <a:r>
-              <a:rPr lang="ja-JP" altLang="ja-JP" sz="5400" dirty="0"/>
-              <a:t>・ゲームに合ったPC選び</a:t>
-            </a:r>
-            <a:endParaRPr lang="en-US" altLang="ja-JP" sz="5400" dirty="0"/>
-          </a:p>
-          <a:p>
-            <a:pPr marL="0" indent="0">
-              <a:buNone/>
-            </a:pPr>
-            <a:r>
-              <a:rPr lang="ja-JP" altLang="en-US" sz="5400" dirty="0"/>
-              <a:t>　</a:t>
-            </a:r>
-            <a:r>
-              <a:rPr lang="ja-JP" altLang="ja-JP" sz="5400" dirty="0"/>
-              <a:t>をサポート</a:t>
+              <a:rPr kumimoji="1" lang="en-US" altLang="ja-JP" sz="7200" dirty="0"/>
+              <a:t>PC</a:t>
+            </a:r>
+            <a:r>
+              <a:rPr kumimoji="1" lang="ja-JP" altLang="en-US" sz="7200" dirty="0"/>
+              <a:t>スペックの紹介サイト</a:t>
             </a:r>
           </a:p>
         </p:txBody>
@@ -4595,7 +5623,7 @@
     </p:spTree>
     <p:extLst>
       <p:ext uri="{BB962C8B-B14F-4D97-AF65-F5344CB8AC3E}">
-        <p14:creationId xmlns:p14="http://schemas.microsoft.com/office/powerpoint/2010/main" val="1552752817"/>
+        <p14:creationId xmlns:p14="http://schemas.microsoft.com/office/powerpoint/2010/main" val="1705222227"/>
       </p:ext>
     </p:extLst>
   </p:cSld>
@@ -4627,6 +5655,132 @@
           <p:cNvPr id="2" name="タイトル 1">
             <a:extLst>
               <a:ext uri="{FF2B5EF4-FFF2-40B4-BE49-F238E27FC236}">
+                <a16:creationId xmlns:a16="http://schemas.microsoft.com/office/drawing/2014/main" id="{B546DA2C-6AE6-5260-6AB3-28CF848D8197}"/>
+              </a:ext>
+            </a:extLst>
+          </p:cNvPr>
+          <p:cNvSpPr>
+            <a:spLocks noGrp="1"/>
+          </p:cNvSpPr>
+          <p:nvPr>
+            <p:ph type="title"/>
+          </p:nvPr>
+        </p:nvSpPr>
+        <p:spPr>
+          <a:xfrm>
+            <a:off x="1295400" y="436034"/>
+            <a:ext cx="9601200" cy="1485900"/>
+          </a:xfrm>
+        </p:spPr>
+        <p:txBody>
+          <a:bodyPr/>
+          <a:lstStyle/>
+          <a:p>
+            <a:r>
+              <a:rPr kumimoji="1" lang="ja-JP" altLang="en-US" dirty="0"/>
+              <a:t>目的</a:t>
+            </a:r>
+          </a:p>
+        </p:txBody>
+      </p:sp>
+      <p:sp>
+        <p:nvSpPr>
+          <p:cNvPr id="3" name="コンテンツ プレースホルダー 2">
+            <a:extLst>
+              <a:ext uri="{FF2B5EF4-FFF2-40B4-BE49-F238E27FC236}">
+                <a16:creationId xmlns:a16="http://schemas.microsoft.com/office/drawing/2014/main" id="{084A4DAF-F98E-C3DE-A20A-16EDB1CE4E5E}"/>
+              </a:ext>
+            </a:extLst>
+          </p:cNvPr>
+          <p:cNvSpPr>
+            <a:spLocks noGrp="1"/>
+          </p:cNvSpPr>
+          <p:nvPr>
+            <p:ph idx="1"/>
+          </p:nvPr>
+        </p:nvSpPr>
+        <p:spPr>
+          <a:xfrm>
+            <a:off x="965200" y="1921934"/>
+            <a:ext cx="9533467" cy="3581400"/>
+          </a:xfrm>
+        </p:spPr>
+        <p:txBody>
+          <a:bodyPr>
+            <a:normAutofit/>
+          </a:bodyPr>
+          <a:lstStyle/>
+          <a:p>
+            <a:r>
+              <a:rPr lang="ja-JP" altLang="ja-JP" sz="5400" dirty="0"/>
+              <a:t>PC初心者でもスペック</a:t>
+            </a:r>
+            <a:r>
+              <a:rPr lang="ja-JP" altLang="en-US" sz="5400" dirty="0"/>
+              <a:t>が　　</a:t>
+            </a:r>
+            <a:r>
+              <a:rPr lang="ja-JP" altLang="ja-JP" sz="5400" dirty="0"/>
+              <a:t>理解できるサイト制作</a:t>
+            </a:r>
+          </a:p>
+          <a:p>
+            <a:r>
+              <a:rPr lang="ja-JP" altLang="ja-JP" sz="5400" dirty="0"/>
+              <a:t>ゲームに合ったPC選び</a:t>
+            </a:r>
+            <a:endParaRPr lang="en-US" altLang="ja-JP" sz="5400" dirty="0"/>
+          </a:p>
+          <a:p>
+            <a:pPr marL="0" indent="0">
+              <a:buNone/>
+            </a:pPr>
+            <a:r>
+              <a:rPr lang="ja-JP" altLang="en-US" sz="5400" dirty="0"/>
+              <a:t>　</a:t>
+            </a:r>
+            <a:r>
+              <a:rPr lang="ja-JP" altLang="ja-JP" sz="5400" dirty="0"/>
+              <a:t>をサポート</a:t>
+            </a:r>
+          </a:p>
+        </p:txBody>
+      </p:sp>
+    </p:spTree>
+    <p:extLst>
+      <p:ext uri="{BB962C8B-B14F-4D97-AF65-F5344CB8AC3E}">
+        <p14:creationId xmlns:p14="http://schemas.microsoft.com/office/powerpoint/2010/main" val="1552752817"/>
+      </p:ext>
+    </p:extLst>
+  </p:cSld>
+  <p:clrMapOvr>
+    <a:masterClrMapping/>
+  </p:clrMapOvr>
+</p:sld>
+</file>
+
+<file path=ppt/slides/slide5.xml><?xml version="1.0" encoding="utf-8"?>
+<p:sld xmlns:a="http://schemas.openxmlformats.org/drawingml/2006/main" xmlns:r="http://schemas.openxmlformats.org/officeDocument/2006/relationships" xmlns:p="http://schemas.openxmlformats.org/presentationml/2006/main">
+  <p:cSld>
+    <p:spTree>
+      <p:nvGrpSpPr>
+        <p:cNvPr id="1" name=""/>
+        <p:cNvGrpSpPr/>
+        <p:nvPr/>
+      </p:nvGrpSpPr>
+      <p:grpSpPr>
+        <a:xfrm>
+          <a:off x="0" y="0"/>
+          <a:ext cx="0" cy="0"/>
+          <a:chOff x="0" y="0"/>
+          <a:chExt cx="0" cy="0"/>
+        </a:xfrm>
+      </p:grpSpPr>
+      <p:sp>
+        <p:nvSpPr>
+          <p:cNvPr id="2" name="タイトル 1">
+            <a:extLst>
+              <a:ext uri="{FF2B5EF4-FFF2-40B4-BE49-F238E27FC236}">
                 <a16:creationId xmlns:a16="http://schemas.microsoft.com/office/drawing/2014/main" id="{0B6FF25F-A11B-4ADE-8B56-A10A58A60219}"/>
               </a:ext>
             </a:extLst>
@@ -4650,7 +5804,7 @@
           <a:p>
             <a:r>
               <a:rPr kumimoji="1" lang="ja-JP" altLang="en-US" dirty="0"/>
-              <a:t>内容</a:t>
+              <a:t>サイトの内容</a:t>
             </a:r>
           </a:p>
         </p:txBody>
@@ -4673,8 +5827,8 @@
         </p:nvSpPr>
         <p:spPr>
           <a:xfrm>
-            <a:off x="804333" y="2463801"/>
-            <a:ext cx="11125200" cy="3920066"/>
+            <a:off x="846667" y="1761066"/>
+            <a:ext cx="11125200" cy="4275667"/>
           </a:xfrm>
         </p:spPr>
         <p:txBody>
@@ -4684,27 +5838,50 @@
           <a:lstStyle/>
           <a:p>
             <a:r>
-              <a:rPr lang="ja-JP" altLang="ja-JP" sz="4000" dirty="0"/>
-              <a:t>・CPU・GPU・メモリ・SSDなどの役割を解説</a:t>
-            </a:r>
-          </a:p>
-          <a:p>
-            <a:r>
-              <a:rPr lang="ja-JP" altLang="ja-JP" sz="4000" dirty="0"/>
-              <a:t>・ゲームに合わせたおすすめPC構成を紹介 </a:t>
-            </a:r>
-          </a:p>
-          <a:p>
-            <a:r>
-              <a:rPr lang="ja-JP" altLang="ja-JP" sz="4000" dirty="0"/>
-              <a:t>・予算や用途に応じたPCの選び方を紹介</a:t>
-            </a:r>
-            <a:endParaRPr lang="en-US" altLang="ja-JP" sz="4000" dirty="0"/>
-          </a:p>
-          <a:p>
-            <a:r>
-              <a:rPr lang="ja-JP" altLang="ja-JP" sz="4000" dirty="0"/>
-              <a:t>・ゲームごとの必要スペックを比較</a:t>
+              <a:rPr lang="ja-JP" altLang="ja-JP" sz="2400" dirty="0"/>
+              <a:t>- ページ１「サイト概要」</a:t>
+            </a:r>
+          </a:p>
+          <a:p>
+            <a:r>
+              <a:rPr lang="ja-JP" altLang="ja-JP" sz="2400" dirty="0"/>
+              <a:t>- ページ２「ゲームを一覧表示」</a:t>
+            </a:r>
+          </a:p>
+          <a:p>
+            <a:r>
+              <a:rPr lang="ja-JP" altLang="ja-JP" sz="2400" dirty="0"/>
+              <a:t>- ページ３「ゲーム概要、最低・推奨スペック、対応OS、必要ストレージ」</a:t>
+            </a:r>
+          </a:p>
+          <a:p>
+            <a:r>
+              <a:rPr lang="ja-JP" altLang="ja-JP" sz="2400" dirty="0"/>
+              <a:t>- ページ４「ゲームごとの必要スペックを比較」</a:t>
+            </a:r>
+          </a:p>
+          <a:p>
+            <a:r>
+              <a:rPr lang="ja-JP" altLang="ja-JP" sz="2400" dirty="0"/>
+              <a:t>- ページ５「ゲームに合わせたおすすめPC構成を紹介」</a:t>
+            </a:r>
+          </a:p>
+          <a:p>
+            <a:r>
+              <a:rPr lang="ja-JP" altLang="ja-JP" sz="2400" dirty="0"/>
+              <a:t>- ページ６「CPU・GPU・メモリ・SSDなどの役割を解説」 </a:t>
+            </a:r>
+          </a:p>
+          <a:p>
+            <a:r>
+              <a:rPr lang="ja-JP" altLang="ja-JP" sz="2400" dirty="0"/>
+              <a:t>- ページ７「予算や用途に応じたPCの選び方を紹介」</a:t>
+            </a:r>
+          </a:p>
+          <a:p>
+            <a:r>
+              <a:rPr lang="ja-JP" altLang="ja-JP" sz="2400" dirty="0"/>
+              <a:t>- ページ８「よくある質問と回答・お問い合わせフォーム・購入フォーム」</a:t>
             </a:r>
           </a:p>
         </p:txBody>
@@ -4722,7 +5899,7 @@
 </p:sld>
 </file>
 
-<file path=ppt/slides/slide5.xml><?xml version="1.0" encoding="utf-8"?>
+<file path=ppt/slides/slide6.xml><?xml version="1.0" encoding="utf-8"?>
 <p:sld xmlns:a="http://schemas.openxmlformats.org/drawingml/2006/main" xmlns:r="http://schemas.openxmlformats.org/officeDocument/2006/relationships" xmlns:p="http://schemas.openxmlformats.org/presentationml/2006/main">
   <p:cSld>
     <p:bg>
@@ -4952,126 +6129,6 @@
     <p:extLst>
       <p:ext uri="{BB962C8B-B14F-4D97-AF65-F5344CB8AC3E}">
         <p14:creationId xmlns:p14="http://schemas.microsoft.com/office/powerpoint/2010/main" val="3090439607"/>
-      </p:ext>
-    </p:extLst>
-  </p:cSld>
-  <p:clrMapOvr>
-    <a:masterClrMapping/>
-  </p:clrMapOvr>
-</p:sld>
-</file>
-
-<file path=ppt/slides/slide6.xml><?xml version="1.0" encoding="utf-8"?>
-<p:sld xmlns:a="http://schemas.openxmlformats.org/drawingml/2006/main" xmlns:r="http://schemas.openxmlformats.org/officeDocument/2006/relationships" xmlns:p="http://schemas.openxmlformats.org/presentationml/2006/main">
-  <p:cSld>
-    <p:spTree>
-      <p:nvGrpSpPr>
-        <p:cNvPr id="1" name=""/>
-        <p:cNvGrpSpPr/>
-        <p:nvPr/>
-      </p:nvGrpSpPr>
-      <p:grpSpPr>
-        <a:xfrm>
-          <a:off x="0" y="0"/>
-          <a:ext cx="0" cy="0"/>
-          <a:chOff x="0" y="0"/>
-          <a:chExt cx="0" cy="0"/>
-        </a:xfrm>
-      </p:grpSpPr>
-      <p:sp>
-        <p:nvSpPr>
-          <p:cNvPr id="2" name="タイトル 1">
-            <a:extLst>
-              <a:ext uri="{FF2B5EF4-FFF2-40B4-BE49-F238E27FC236}">
-                <a16:creationId xmlns:a16="http://schemas.microsoft.com/office/drawing/2014/main" id="{80D2298F-ED67-4DF1-AEC5-6B52E21F153D}"/>
-              </a:ext>
-            </a:extLst>
-          </p:cNvPr>
-          <p:cNvSpPr>
-            <a:spLocks noGrp="1"/>
-          </p:cNvSpPr>
-          <p:nvPr>
-            <p:ph type="title"/>
-          </p:nvPr>
-        </p:nvSpPr>
-        <p:spPr>
-          <a:xfrm>
-            <a:off x="1295400" y="533401"/>
-            <a:ext cx="9601200" cy="1485900"/>
-          </a:xfrm>
-        </p:spPr>
-        <p:txBody>
-          <a:bodyPr/>
-          <a:lstStyle/>
-          <a:p>
-            <a:r>
-              <a:rPr kumimoji="1" lang="ja-JP" altLang="en-US" dirty="0"/>
-              <a:t>背景・内容</a:t>
-            </a:r>
-          </a:p>
-        </p:txBody>
-      </p:sp>
-      <p:sp>
-        <p:nvSpPr>
-          <p:cNvPr id="3" name="コンテンツ プレースホルダー 2">
-            <a:extLst>
-              <a:ext uri="{FF2B5EF4-FFF2-40B4-BE49-F238E27FC236}">
-                <a16:creationId xmlns:a16="http://schemas.microsoft.com/office/drawing/2014/main" id="{1CF8380F-EFDF-B7A4-4998-C0F909C45C00}"/>
-              </a:ext>
-            </a:extLst>
-          </p:cNvPr>
-          <p:cNvSpPr>
-            <a:spLocks noGrp="1"/>
-          </p:cNvSpPr>
-          <p:nvPr>
-            <p:ph idx="1"/>
-          </p:nvPr>
-        </p:nvSpPr>
-        <p:spPr>
-          <a:xfrm>
-            <a:off x="880532" y="2260600"/>
-            <a:ext cx="11184468" cy="3581400"/>
-          </a:xfrm>
-        </p:spPr>
-        <p:txBody>
-          <a:bodyPr>
-            <a:normAutofit/>
-          </a:bodyPr>
-          <a:lstStyle/>
-          <a:p>
-            <a:r>
-              <a:rPr lang="ja-JP" altLang="ja-JP" sz="5400" dirty="0"/>
-              <a:t>・果樹園の魅力を多くの人に</a:t>
-            </a:r>
-            <a:r>
-              <a:rPr lang="ja-JP" altLang="en-US" sz="5400" dirty="0"/>
-              <a:t>　　</a:t>
-            </a:r>
-            <a:r>
-              <a:rPr lang="ja-JP" altLang="ja-JP" sz="5400" dirty="0"/>
-              <a:t>伝える</a:t>
-            </a:r>
-          </a:p>
-          <a:p>
-            <a:r>
-              <a:rPr lang="ja-JP" altLang="ja-JP" sz="5400" dirty="0"/>
-              <a:t>・利用者が必要な情報を見つけ</a:t>
-            </a:r>
-            <a:r>
-              <a:rPr lang="ja-JP" altLang="en-US" sz="5400" dirty="0"/>
-              <a:t>　</a:t>
-            </a:r>
-            <a:r>
-              <a:rPr lang="ja-JP" altLang="ja-JP" sz="5400" dirty="0"/>
-              <a:t>やすいサイト制作</a:t>
-            </a:r>
-          </a:p>
-        </p:txBody>
-      </p:sp>
-    </p:spTree>
-    <p:extLst>
-      <p:ext uri="{BB962C8B-B14F-4D97-AF65-F5344CB8AC3E}">
-        <p14:creationId xmlns:p14="http://schemas.microsoft.com/office/powerpoint/2010/main" val="3373366793"/>
       </p:ext>
     </p:extLst>
   </p:cSld>
@@ -5103,6 +6160,124 @@
           <p:cNvPr id="2" name="タイトル 1">
             <a:extLst>
               <a:ext uri="{FF2B5EF4-FFF2-40B4-BE49-F238E27FC236}">
+                <a16:creationId xmlns:a16="http://schemas.microsoft.com/office/drawing/2014/main" id="{80D2298F-ED67-4DF1-AEC5-6B52E21F153D}"/>
+              </a:ext>
+            </a:extLst>
+          </p:cNvPr>
+          <p:cNvSpPr>
+            <a:spLocks noGrp="1"/>
+          </p:cNvSpPr>
+          <p:nvPr>
+            <p:ph type="title"/>
+          </p:nvPr>
+        </p:nvSpPr>
+        <p:spPr>
+          <a:xfrm>
+            <a:off x="1295400" y="533401"/>
+            <a:ext cx="9601200" cy="1485900"/>
+          </a:xfrm>
+        </p:spPr>
+        <p:txBody>
+          <a:bodyPr/>
+          <a:lstStyle/>
+          <a:p>
+            <a:r>
+              <a:rPr lang="ja-JP" altLang="en-US" dirty="0"/>
+              <a:t>目的</a:t>
+            </a:r>
+            <a:endParaRPr kumimoji="1" lang="ja-JP" altLang="en-US" dirty="0"/>
+          </a:p>
+        </p:txBody>
+      </p:sp>
+      <p:sp>
+        <p:nvSpPr>
+          <p:cNvPr id="3" name="コンテンツ プレースホルダー 2">
+            <a:extLst>
+              <a:ext uri="{FF2B5EF4-FFF2-40B4-BE49-F238E27FC236}">
+                <a16:creationId xmlns:a16="http://schemas.microsoft.com/office/drawing/2014/main" id="{1CF8380F-EFDF-B7A4-4998-C0F909C45C00}"/>
+              </a:ext>
+            </a:extLst>
+          </p:cNvPr>
+          <p:cNvSpPr>
+            <a:spLocks noGrp="1"/>
+          </p:cNvSpPr>
+          <p:nvPr>
+            <p:ph idx="1"/>
+          </p:nvPr>
+        </p:nvSpPr>
+        <p:spPr>
+          <a:xfrm>
+            <a:off x="880532" y="2260600"/>
+            <a:ext cx="11184468" cy="3581400"/>
+          </a:xfrm>
+        </p:spPr>
+        <p:txBody>
+          <a:bodyPr>
+            <a:normAutofit/>
+          </a:bodyPr>
+          <a:lstStyle/>
+          <a:p>
+            <a:r>
+              <a:rPr lang="ja-JP" altLang="ja-JP" sz="5400" dirty="0"/>
+              <a:t>果樹園の魅力を多くの人に</a:t>
+            </a:r>
+            <a:r>
+              <a:rPr lang="ja-JP" altLang="en-US" sz="5400" dirty="0"/>
+              <a:t>知ってもらいたい</a:t>
+            </a:r>
+            <a:endParaRPr lang="ja-JP" altLang="ja-JP" sz="5400" dirty="0"/>
+          </a:p>
+          <a:p>
+            <a:r>
+              <a:rPr lang="ja-JP" altLang="ja-JP" sz="5400" dirty="0"/>
+              <a:t>利用者が必要な情報を見つけ</a:t>
+            </a:r>
+            <a:r>
+              <a:rPr lang="ja-JP" altLang="en-US" sz="5400" dirty="0"/>
+              <a:t>　　</a:t>
+            </a:r>
+            <a:r>
+              <a:rPr lang="ja-JP" altLang="ja-JP" sz="5400" dirty="0"/>
+              <a:t>やすいサイト制作</a:t>
+            </a:r>
+          </a:p>
+        </p:txBody>
+      </p:sp>
+    </p:spTree>
+    <p:extLst>
+      <p:ext uri="{BB962C8B-B14F-4D97-AF65-F5344CB8AC3E}">
+        <p14:creationId xmlns:p14="http://schemas.microsoft.com/office/powerpoint/2010/main" val="3373366793"/>
+      </p:ext>
+    </p:extLst>
+  </p:cSld>
+  <p:clrMapOvr>
+    <a:masterClrMapping/>
+  </p:clrMapOvr>
+</p:sld>
+</file>
+
+<file path=ppt/slides/slide8.xml><?xml version="1.0" encoding="utf-8"?>
+<p:sld xmlns:a="http://schemas.openxmlformats.org/drawingml/2006/main" xmlns:r="http://schemas.openxmlformats.org/officeDocument/2006/relationships" xmlns:p="http://schemas.openxmlformats.org/presentationml/2006/main">
+  <p:cSld>
+    <p:spTree>
+      <p:nvGrpSpPr>
+        <p:cNvPr id="1" name=""/>
+        <p:cNvGrpSpPr/>
+        <p:nvPr/>
+      </p:nvGrpSpPr>
+      <p:grpSpPr>
+        <a:xfrm>
+          <a:off x="0" y="0"/>
+          <a:ext cx="0" cy="0"/>
+          <a:chOff x="0" y="0"/>
+          <a:chExt cx="0" cy="0"/>
+        </a:xfrm>
+      </p:grpSpPr>
+      <p:sp>
+        <p:nvSpPr>
+          <p:cNvPr id="2" name="タイトル 1">
+            <a:extLst>
+              <a:ext uri="{FF2B5EF4-FFF2-40B4-BE49-F238E27FC236}">
                 <a16:creationId xmlns:a16="http://schemas.microsoft.com/office/drawing/2014/main" id="{F6A81369-A628-1DCC-4545-31FE58D44F57}"/>
               </a:ext>
             </a:extLst>
@@ -5126,7 +6301,7 @@
           <a:p>
             <a:r>
               <a:rPr kumimoji="1" lang="ja-JP" altLang="en-US" dirty="0"/>
-              <a:t>内容</a:t>
+              <a:t>サイトの内容</a:t>
             </a:r>
           </a:p>
         </p:txBody>
@@ -5149,8 +6324,8 @@
         </p:nvSpPr>
         <p:spPr>
           <a:xfrm>
-            <a:off x="931333" y="2015067"/>
-            <a:ext cx="10964334" cy="3581400"/>
+            <a:off x="931333" y="2053167"/>
+            <a:ext cx="10964334" cy="4114800"/>
           </a:xfrm>
         </p:spPr>
         <p:txBody>
@@ -5160,28 +6335,50 @@
           <a:lstStyle/>
           <a:p>
             <a:r>
-              <a:rPr lang="ja-JP" altLang="ja-JP" sz="5400" dirty="0"/>
-              <a:t>・果樹園の紹介・歴史</a:t>
-            </a:r>
-          </a:p>
-          <a:p>
-            <a:r>
-              <a:rPr lang="ja-JP" altLang="ja-JP" sz="5400" dirty="0"/>
-              <a:t>・収穫できる果実・旬・収穫時期</a:t>
-            </a:r>
-            <a:endParaRPr lang="en-US" altLang="ja-JP" sz="5400" dirty="0"/>
-          </a:p>
-          <a:p>
-            <a:r>
-              <a:rPr lang="ja-JP" altLang="ja-JP" sz="5400" dirty="0"/>
-              <a:t>・生産者紹介・挨拶</a:t>
-            </a:r>
-            <a:endParaRPr lang="en-US" altLang="ja-JP" sz="5400" dirty="0"/>
-          </a:p>
-          <a:p>
-            <a:r>
-              <a:rPr lang="ja-JP" altLang="ja-JP" sz="5400" dirty="0"/>
-              <a:t>・商品紹介</a:t>
+              <a:rPr lang="ja-JP" altLang="ja-JP" dirty="0"/>
+              <a:t>- ページ１「果樹園の紹介」</a:t>
+            </a:r>
+          </a:p>
+          <a:p>
+            <a:r>
+              <a:rPr lang="ja-JP" altLang="ja-JP" dirty="0"/>
+              <a:t>- ページ２「歴史」</a:t>
+            </a:r>
+          </a:p>
+          <a:p>
+            <a:r>
+              <a:rPr lang="ja-JP" altLang="ja-JP" dirty="0"/>
+              <a:t>- ページ３「生産者紹介・こだわり」</a:t>
+            </a:r>
+          </a:p>
+          <a:p>
+            <a:r>
+              <a:rPr lang="ja-JP" altLang="ja-JP" dirty="0"/>
+              <a:t>- ページ４「果実紹介（旬・収穫時期・品種紹介）」</a:t>
+            </a:r>
+          </a:p>
+          <a:p>
+            <a:r>
+              <a:rPr lang="ja-JP" altLang="ja-JP" dirty="0"/>
+              <a:t>- ページ５「商品紹介（販売している果実・おすすめ商品・料金・保存方法）」</a:t>
+            </a:r>
+          </a:p>
+          <a:p>
+            <a:r>
+              <a:rPr lang="ja-JP" altLang="ja-JP" dirty="0"/>
+              <a:t>- ページ６「営業時間・お知らせ」</a:t>
+            </a:r>
+          </a:p>
+          <a:p>
+            <a:r>
+              <a:rPr lang="ja-JP" altLang="ja-JP" dirty="0"/>
+              <a:t>- ページ７「アクセス・お問い合わせ」</a:t>
+            </a:r>
+          </a:p>
+          <a:p>
+            <a:r>
+              <a:rPr lang="ja-JP" altLang="ja-JP" dirty="0"/>
+              <a:t>- ページ８「注文案内・オンラインショップリンク」</a:t>
             </a:r>
           </a:p>
         </p:txBody>
@@ -5199,7 +6396,7 @@
 </p:sld>
 </file>
 
-<file path=ppt/slides/slide8.xml><?xml version="1.0" encoding="utf-8"?>
+<file path=ppt/slides/slide9.xml><?xml version="1.0" encoding="utf-8"?>
 <p:sld xmlns:a="http://schemas.openxmlformats.org/drawingml/2006/main" xmlns:r="http://schemas.openxmlformats.org/officeDocument/2006/relationships" xmlns:p="http://schemas.openxmlformats.org/presentationml/2006/main">
   <p:cSld>
     <p:bg>
@@ -5418,7 +6615,10 @@
           </a:bodyPr>
           <a:lstStyle/>
           <a:p>
-            <a:endParaRPr kumimoji="1" lang="ja-JP" altLang="en-US" sz="1800" dirty="0"/>
+            <a:r>
+              <a:rPr kumimoji="1" lang="ja-JP" altLang="en-US" sz="5400" dirty="0"/>
+              <a:t>果樹園サイトの紹介</a:t>
+            </a:r>
           </a:p>
         </p:txBody>
       </p:sp>
@@ -5426,86 +6626,6 @@
     <p:extLst>
       <p:ext uri="{BB962C8B-B14F-4D97-AF65-F5344CB8AC3E}">
         <p14:creationId xmlns:p14="http://schemas.microsoft.com/office/powerpoint/2010/main" val="1828314959"/>
-      </p:ext>
-    </p:extLst>
-  </p:cSld>
-  <p:clrMapOvr>
-    <a:masterClrMapping/>
-  </p:clrMapOvr>
-</p:sld>
-</file>
-
-<file path=ppt/slides/slide9.xml><?xml version="1.0" encoding="utf-8"?>
-<p:sld xmlns:a="http://schemas.openxmlformats.org/drawingml/2006/main" xmlns:r="http://schemas.openxmlformats.org/officeDocument/2006/relationships" xmlns:p="http://schemas.openxmlformats.org/presentationml/2006/main">
-  <p:cSld>
-    <p:spTree>
-      <p:nvGrpSpPr>
-        <p:cNvPr id="1" name=""/>
-        <p:cNvGrpSpPr/>
-        <p:nvPr/>
-      </p:nvGrpSpPr>
-      <p:grpSpPr>
-        <a:xfrm>
-          <a:off x="0" y="0"/>
-          <a:ext cx="0" cy="0"/>
-          <a:chOff x="0" y="0"/>
-          <a:chExt cx="0" cy="0"/>
-        </a:xfrm>
-      </p:grpSpPr>
-      <p:sp>
-        <p:nvSpPr>
-          <p:cNvPr id="2" name="タイトル 1">
-            <a:extLst>
-              <a:ext uri="{FF2B5EF4-FFF2-40B4-BE49-F238E27FC236}">
-                <a16:creationId xmlns:a16="http://schemas.microsoft.com/office/drawing/2014/main" id="{3EC21A96-5921-9A1B-F9DA-65DC9FC8689B}"/>
-              </a:ext>
-            </a:extLst>
-          </p:cNvPr>
-          <p:cNvSpPr>
-            <a:spLocks noGrp="1"/>
-          </p:cNvSpPr>
-          <p:nvPr>
-            <p:ph type="title"/>
-          </p:nvPr>
-        </p:nvSpPr>
-        <p:spPr/>
-        <p:txBody>
-          <a:bodyPr/>
-          <a:lstStyle/>
-          <a:p>
-            <a:endParaRPr kumimoji="1" lang="ja-JP" altLang="en-US"/>
-          </a:p>
-        </p:txBody>
-      </p:sp>
-      <p:sp>
-        <p:nvSpPr>
-          <p:cNvPr id="3" name="コンテンツ プレースホルダー 2">
-            <a:extLst>
-              <a:ext uri="{FF2B5EF4-FFF2-40B4-BE49-F238E27FC236}">
-                <a16:creationId xmlns:a16="http://schemas.microsoft.com/office/drawing/2014/main" id="{ACD3DDF3-A6EE-97F2-B2B6-615DC906815C}"/>
-              </a:ext>
-            </a:extLst>
-          </p:cNvPr>
-          <p:cNvSpPr>
-            <a:spLocks noGrp="1"/>
-          </p:cNvSpPr>
-          <p:nvPr>
-            <p:ph idx="1"/>
-          </p:nvPr>
-        </p:nvSpPr>
-        <p:spPr/>
-        <p:txBody>
-          <a:bodyPr/>
-          <a:lstStyle/>
-          <a:p>
-            <a:endParaRPr kumimoji="1" lang="ja-JP" altLang="en-US"/>
-          </a:p>
-        </p:txBody>
-      </p:sp>
-    </p:spTree>
-    <p:extLst>
-      <p:ext uri="{BB962C8B-B14F-4D97-AF65-F5344CB8AC3E}">
-        <p14:creationId xmlns:p14="http://schemas.microsoft.com/office/powerpoint/2010/main" val="2463679976"/>
       </p:ext>
     </p:extLst>
   </p:cSld>
